--- a/eval/out/gates_slide5.pptx
+++ b/eval/out/gates_slide5.pptx
@@ -3096,9 +3096,33 @@
         <p:nvPr/>
       </p:nvGrpSpPr>
       <p:grpSpPr/>
-      <p:sp>
-        <p:nvSpPr>
-          <p:cNvPr id="2" name="TextBox 1"/>
+      <p:pic>
+        <p:nvPicPr>
+          <p:cNvPr id="2" name="Picture 1" descr="map_region_a6.png"/>
+          <p:cNvPicPr>
+            <a:picLocks noChangeAspect="1"/>
+          </p:cNvPicPr>
+          <p:nvPr/>
+        </p:nvPicPr>
+        <p:blipFill>
+          <a:blip r:embed="rId2"/>
+          <a:stretch>
+            <a:fillRect/>
+          </a:stretch>
+        </p:blipFill>
+        <p:spPr>
+          <a:xfrm>
+            <a:off x="3832860" y="1280160"/>
+            <a:ext cx="4526280" cy="5029200"/>
+          </a:xfrm>
+          <a:prstGeom prst="rect">
+            <a:avLst/>
+          </a:prstGeom>
+        </p:spPr>
+      </p:pic>
+      <p:sp>
+        <p:nvSpPr>
+          <p:cNvPr id="3" name="TextBox 2"/>
           <p:cNvSpPr txBox="1"/>
           <p:nvPr/>
         </p:nvSpPr>
@@ -3251,7 +3275,7 @@
       </p:sp>
       <p:sp>
         <p:nvSpPr>
-          <p:cNvPr id="3" name="TextBox 2"/>
+          <p:cNvPr id="4" name="TextBox 3"/>
           <p:cNvSpPr txBox="1"/>
           <p:nvPr/>
         </p:nvSpPr>
@@ -3386,7 +3410,7 @@
       </p:sp>
       <p:sp>
         <p:nvSpPr>
-          <p:cNvPr id="4" name="Rectangle 3"/>
+          <p:cNvPr id="5" name="Rectangle 4"/>
           <p:cNvSpPr/>
           <p:nvPr/>
         </p:nvSpPr>
@@ -3448,7 +3472,7 @@
       </p:sp>
       <p:sp>
         <p:nvSpPr>
-          <p:cNvPr id="5" name="Rectangle 4"/>
+          <p:cNvPr id="6" name="Rectangle 5"/>
           <p:cNvSpPr/>
           <p:nvPr/>
         </p:nvSpPr>
@@ -3510,7 +3534,7 @@
       </p:sp>
       <p:sp>
         <p:nvSpPr>
-          <p:cNvPr id="6" name="Rectangle 5"/>
+          <p:cNvPr id="7" name="Rectangle 6"/>
           <p:cNvSpPr/>
           <p:nvPr/>
         </p:nvSpPr>
@@ -3572,7 +3596,7 @@
       </p:sp>
       <p:sp>
         <p:nvSpPr>
-          <p:cNvPr id="7" name="Pentagon 6"/>
+          <p:cNvPr id="8" name="Pentagon 7"/>
           <p:cNvSpPr/>
           <p:nvPr/>
         </p:nvSpPr>
@@ -3646,7 +3670,7 @@
       </p:sp>
       <p:sp>
         <p:nvSpPr>
-          <p:cNvPr id="8" name="TextBox 7"/>
+          <p:cNvPr id="9" name="TextBox 8"/>
           <p:cNvSpPr txBox="1"/>
           <p:nvPr/>
         </p:nvSpPr>
@@ -3691,7 +3715,7 @@
       </p:sp>
       <p:sp>
         <p:nvSpPr>
-          <p:cNvPr id="9" name="TextBox 8"/>
+          <p:cNvPr id="10" name="TextBox 9"/>
           <p:cNvSpPr txBox="1"/>
           <p:nvPr/>
         </p:nvSpPr>
@@ -3736,7 +3760,7 @@
       </p:sp>
       <p:cxnSp>
         <p:nvCxnSpPr>
-          <p:cNvPr id="10" name="Connector 9"/>
+          <p:cNvPr id="11" name="Connector 10"/>
           <p:cNvCxnSpPr/>
           <p:nvPr/>
         </p:nvCxnSpPr>
@@ -3771,7 +3795,7 @@
       </p:cxnSp>
       <p:sp>
         <p:nvSpPr>
-          <p:cNvPr id="11" name="TextBox 10"/>
+          <p:cNvPr id="12" name="TextBox 11"/>
           <p:cNvSpPr txBox="1"/>
           <p:nvPr/>
         </p:nvSpPr>
@@ -3816,7 +3840,7 @@
       </p:sp>
       <p:sp>
         <p:nvSpPr>
-          <p:cNvPr id="12" name="TextBox 11"/>
+          <p:cNvPr id="13" name="TextBox 12"/>
           <p:cNvSpPr txBox="1"/>
           <p:nvPr/>
         </p:nvSpPr>
@@ -3861,7 +3885,7 @@
       </p:sp>
       <p:cxnSp>
         <p:nvCxnSpPr>
-          <p:cNvPr id="13" name="Connector 12"/>
+          <p:cNvPr id="14" name="Connector 13"/>
           <p:cNvCxnSpPr/>
           <p:nvPr/>
         </p:nvCxnSpPr>
@@ -3896,7 +3920,7 @@
       </p:cxnSp>
       <p:sp>
         <p:nvSpPr>
-          <p:cNvPr id="14" name="TextBox 13"/>
+          <p:cNvPr id="15" name="TextBox 14"/>
           <p:cNvSpPr txBox="1"/>
           <p:nvPr/>
         </p:nvSpPr>
@@ -3941,7 +3965,7 @@
       </p:sp>
       <p:sp>
         <p:nvSpPr>
-          <p:cNvPr id="15" name="TextBox 14"/>
+          <p:cNvPr id="16" name="TextBox 15"/>
           <p:cNvSpPr txBox="1"/>
           <p:nvPr/>
         </p:nvSpPr>
@@ -3986,7 +4010,7 @@
       </p:sp>
       <p:cxnSp>
         <p:nvCxnSpPr>
-          <p:cNvPr id="16" name="Connector 15"/>
+          <p:cNvPr id="17" name="Connector 16"/>
           <p:cNvCxnSpPr/>
           <p:nvPr/>
         </p:nvCxnSpPr>
@@ -4021,7 +4045,7 @@
       </p:cxnSp>
       <p:sp>
         <p:nvSpPr>
-          <p:cNvPr id="17" name="TextBox 16"/>
+          <p:cNvPr id="18" name="TextBox 17"/>
           <p:cNvSpPr txBox="1"/>
           <p:nvPr/>
         </p:nvSpPr>
@@ -4066,7 +4090,7 @@
       </p:sp>
       <p:sp>
         <p:nvSpPr>
-          <p:cNvPr id="18" name="TextBox 17"/>
+          <p:cNvPr id="19" name="TextBox 18"/>
           <p:cNvSpPr txBox="1"/>
           <p:nvPr/>
         </p:nvSpPr>
@@ -4111,7 +4135,7 @@
       </p:sp>
       <p:cxnSp>
         <p:nvCxnSpPr>
-          <p:cNvPr id="19" name="Connector 18"/>
+          <p:cNvPr id="20" name="Connector 19"/>
           <p:cNvCxnSpPr/>
           <p:nvPr/>
         </p:nvCxnSpPr>
@@ -4146,7 +4170,7 @@
       </p:cxnSp>
       <p:sp>
         <p:nvSpPr>
-          <p:cNvPr id="20" name="TextBox 19"/>
+          <p:cNvPr id="21" name="TextBox 20"/>
           <p:cNvSpPr txBox="1"/>
           <p:nvPr/>
         </p:nvSpPr>
@@ -4191,7 +4215,7 @@
       </p:sp>
       <p:sp>
         <p:nvSpPr>
-          <p:cNvPr id="21" name="TextBox 20"/>
+          <p:cNvPr id="22" name="TextBox 21"/>
           <p:cNvSpPr txBox="1"/>
           <p:nvPr/>
         </p:nvSpPr>
@@ -4236,7 +4260,7 @@
       </p:sp>
       <p:cxnSp>
         <p:nvCxnSpPr>
-          <p:cNvPr id="22" name="Connector 21"/>
+          <p:cNvPr id="23" name="Connector 22"/>
           <p:cNvCxnSpPr/>
           <p:nvPr/>
         </p:nvCxnSpPr>
@@ -4271,7 +4295,7 @@
       </p:cxnSp>
       <p:sp>
         <p:nvSpPr>
-          <p:cNvPr id="23" name="TextBox 22"/>
+          <p:cNvPr id="24" name="TextBox 23"/>
           <p:cNvSpPr txBox="1"/>
           <p:nvPr/>
         </p:nvSpPr>
@@ -4316,7 +4340,7 @@
       </p:sp>
       <p:sp>
         <p:nvSpPr>
-          <p:cNvPr id="24" name="TextBox 23"/>
+          <p:cNvPr id="25" name="TextBox 24"/>
           <p:cNvSpPr txBox="1"/>
           <p:nvPr/>
         </p:nvSpPr>
@@ -4361,7 +4385,7 @@
       </p:sp>
       <p:cxnSp>
         <p:nvCxnSpPr>
-          <p:cNvPr id="25" name="Connector 24"/>
+          <p:cNvPr id="26" name="Connector 25"/>
           <p:cNvCxnSpPr/>
           <p:nvPr/>
         </p:nvCxnSpPr>
@@ -4396,7 +4420,7 @@
       </p:cxnSp>
       <p:sp>
         <p:nvSpPr>
-          <p:cNvPr id="26" name="TextBox 25"/>
+          <p:cNvPr id="27" name="TextBox 26"/>
           <p:cNvSpPr txBox="1"/>
           <p:nvPr/>
         </p:nvSpPr>
@@ -4441,7 +4465,7 @@
       </p:sp>
       <p:sp>
         <p:nvSpPr>
-          <p:cNvPr id="27" name="TextBox 26"/>
+          <p:cNvPr id="28" name="TextBox 27"/>
           <p:cNvSpPr txBox="1"/>
           <p:nvPr/>
         </p:nvSpPr>
@@ -4486,7 +4510,7 @@
       </p:sp>
       <p:cxnSp>
         <p:nvCxnSpPr>
-          <p:cNvPr id="28" name="Connector 27"/>
+          <p:cNvPr id="29" name="Connector 28"/>
           <p:cNvCxnSpPr/>
           <p:nvPr/>
         </p:nvCxnSpPr>
@@ -4521,7 +4545,7 @@
       </p:cxnSp>
       <p:sp>
         <p:nvSpPr>
-          <p:cNvPr id="29" name="TextBox 28"/>
+          <p:cNvPr id="30" name="TextBox 29"/>
           <p:cNvSpPr txBox="1"/>
           <p:nvPr/>
         </p:nvSpPr>
@@ -4566,7 +4590,7 @@
       </p:sp>
       <p:sp>
         <p:nvSpPr>
-          <p:cNvPr id="30" name="TextBox 29"/>
+          <p:cNvPr id="31" name="TextBox 30"/>
           <p:cNvSpPr txBox="1"/>
           <p:nvPr/>
         </p:nvSpPr>
@@ -4611,7 +4635,7 @@
       </p:sp>
       <p:cxnSp>
         <p:nvCxnSpPr>
-          <p:cNvPr id="31" name="Connector 30"/>
+          <p:cNvPr id="32" name="Connector 31"/>
           <p:cNvCxnSpPr/>
           <p:nvPr/>
         </p:nvCxnSpPr>
@@ -4646,7 +4670,7 @@
       </p:cxnSp>
       <p:sp>
         <p:nvSpPr>
-          <p:cNvPr id="32" name="TextBox 31"/>
+          <p:cNvPr id="33" name="TextBox 32"/>
           <p:cNvSpPr txBox="1"/>
           <p:nvPr/>
         </p:nvSpPr>
@@ -4691,7 +4715,7 @@
       </p:sp>
       <p:sp>
         <p:nvSpPr>
-          <p:cNvPr id="33" name="TextBox 32"/>
+          <p:cNvPr id="34" name="TextBox 33"/>
           <p:cNvSpPr txBox="1"/>
           <p:nvPr/>
         </p:nvSpPr>
@@ -4736,7 +4760,7 @@
       </p:sp>
       <p:cxnSp>
         <p:nvCxnSpPr>
-          <p:cNvPr id="34" name="Connector 33"/>
+          <p:cNvPr id="35" name="Connector 34"/>
           <p:cNvCxnSpPr/>
           <p:nvPr/>
         </p:nvCxnSpPr>
@@ -4771,7 +4795,7 @@
       </p:cxnSp>
       <p:sp>
         <p:nvSpPr>
-          <p:cNvPr id="35" name="Pentagon 34"/>
+          <p:cNvPr id="36" name="Pentagon 35"/>
           <p:cNvSpPr/>
           <p:nvPr/>
         </p:nvSpPr>
@@ -4845,7 +4869,7 @@
       </p:sp>
       <p:sp>
         <p:nvSpPr>
-          <p:cNvPr id="36" name="TextBox 35"/>
+          <p:cNvPr id="37" name="TextBox 36"/>
           <p:cNvSpPr txBox="1"/>
           <p:nvPr/>
         </p:nvSpPr>
@@ -5105,7 +5129,7 @@
       </p:sp>
       <p:sp>
         <p:nvSpPr>
-          <p:cNvPr id="37" name="TextBox 36"/>
+          <p:cNvPr id="38" name="TextBox 37"/>
           <p:cNvSpPr txBox="1"/>
           <p:nvPr/>
         </p:nvSpPr>
@@ -5365,7 +5389,7 @@
       </p:sp>
       <p:sp>
         <p:nvSpPr>
-          <p:cNvPr id="38" name="TextBox 37"/>
+          <p:cNvPr id="39" name="TextBox 38"/>
           <p:cNvSpPr txBox="1"/>
           <p:nvPr/>
         </p:nvSpPr>
@@ -5625,7 +5649,7 @@
       </p:sp>
       <p:sp>
         <p:nvSpPr>
-          <p:cNvPr id="39" name="Pentagon 38"/>
+          <p:cNvPr id="40" name="Pentagon 39"/>
           <p:cNvSpPr/>
           <p:nvPr/>
         </p:nvSpPr>
@@ -5699,7 +5723,7 @@
       </p:sp>
       <p:sp>
         <p:nvSpPr>
-          <p:cNvPr id="40" name="TextBox 39"/>
+          <p:cNvPr id="41" name="TextBox 40"/>
           <p:cNvSpPr txBox="1"/>
           <p:nvPr/>
         </p:nvSpPr>
@@ -5910,7 +5934,7 @@
       </p:sp>
       <p:sp>
         <p:nvSpPr>
-          <p:cNvPr id="41" name="TextBox 40"/>
+          <p:cNvPr id="42" name="TextBox 41"/>
           <p:cNvSpPr txBox="1"/>
           <p:nvPr/>
         </p:nvSpPr>
@@ -6121,7 +6145,7 @@
       </p:sp>
       <p:sp>
         <p:nvSpPr>
-          <p:cNvPr id="42" name="TextBox 41"/>
+          <p:cNvPr id="43" name="TextBox 42"/>
           <p:cNvSpPr txBox="1"/>
           <p:nvPr/>
         </p:nvSpPr>
@@ -6332,7 +6356,7 @@
       </p:sp>
       <p:sp>
         <p:nvSpPr>
-          <p:cNvPr id="43" name="Pentagon 42"/>
+          <p:cNvPr id="44" name="Pentagon 43"/>
           <p:cNvSpPr/>
           <p:nvPr/>
         </p:nvSpPr>
@@ -6424,7 +6448,7 @@
       </p:sp>
       <p:sp>
         <p:nvSpPr>
-          <p:cNvPr id="44" name="Rectangle 43"/>
+          <p:cNvPr id="45" name="Rectangle 44"/>
           <p:cNvSpPr/>
           <p:nvPr/>
         </p:nvSpPr>
@@ -6491,7 +6515,7 @@
       </p:sp>
       <p:sp>
         <p:nvSpPr>
-          <p:cNvPr id="45" name="Rectangle 44"/>
+          <p:cNvPr id="46" name="Rectangle 45"/>
           <p:cNvSpPr/>
           <p:nvPr/>
         </p:nvSpPr>
@@ -6558,7 +6582,7 @@
       </p:sp>
       <p:sp>
         <p:nvSpPr>
-          <p:cNvPr id="46" name="Rectangle 45"/>
+          <p:cNvPr id="47" name="Rectangle 46"/>
           <p:cNvSpPr/>
           <p:nvPr/>
         </p:nvSpPr>
@@ -6625,7 +6649,7 @@
       </p:sp>
       <p:sp>
         <p:nvSpPr>
-          <p:cNvPr id="47" name="Rectangle 46"/>
+          <p:cNvPr id="48" name="Rectangle 47"/>
           <p:cNvSpPr/>
           <p:nvPr/>
         </p:nvSpPr>
@@ -6692,7 +6716,7 @@
       </p:sp>
       <p:sp>
         <p:nvSpPr>
-          <p:cNvPr id="48" name="Rectangle 47"/>
+          <p:cNvPr id="49" name="Rectangle 48"/>
           <p:cNvSpPr/>
           <p:nvPr/>
         </p:nvSpPr>
@@ -6759,7 +6783,7 @@
       </p:sp>
       <p:sp>
         <p:nvSpPr>
-          <p:cNvPr id="49" name="Rectangle 48"/>
+          <p:cNvPr id="50" name="Rectangle 49"/>
           <p:cNvSpPr/>
           <p:nvPr/>
         </p:nvSpPr>
@@ -6826,7 +6850,7 @@
       </p:sp>
       <p:sp>
         <p:nvSpPr>
-          <p:cNvPr id="50" name="Rectangle 49"/>
+          <p:cNvPr id="51" name="Rectangle 50"/>
           <p:cNvSpPr/>
           <p:nvPr/>
         </p:nvSpPr>
@@ -6893,7 +6917,7 @@
       </p:sp>
       <p:sp>
         <p:nvSpPr>
-          <p:cNvPr id="51" name="Rectangle 50"/>
+          <p:cNvPr id="52" name="Rectangle 51"/>
           <p:cNvSpPr/>
           <p:nvPr/>
         </p:nvSpPr>
@@ -6960,7 +6984,7 @@
       </p:sp>
       <p:sp>
         <p:nvSpPr>
-          <p:cNvPr id="52" name="Rectangle 51"/>
+          <p:cNvPr id="53" name="Rectangle 52"/>
           <p:cNvSpPr/>
           <p:nvPr/>
         </p:nvSpPr>
@@ -7027,7 +7051,7 @@
       </p:sp>
       <p:sp>
         <p:nvSpPr>
-          <p:cNvPr id="53" name="Rectangle 52"/>
+          <p:cNvPr id="54" name="Rectangle 53"/>
           <p:cNvSpPr/>
           <p:nvPr/>
         </p:nvSpPr>
@@ -7094,7 +7118,7 @@
       </p:sp>
       <p:sp>
         <p:nvSpPr>
-          <p:cNvPr id="54" name="Rectangle 53"/>
+          <p:cNvPr id="55" name="Rectangle 54"/>
           <p:cNvSpPr/>
           <p:nvPr/>
         </p:nvSpPr>
@@ -7161,7 +7185,7 @@
       </p:sp>
       <p:sp>
         <p:nvSpPr>
-          <p:cNvPr id="55" name="Rectangle 54"/>
+          <p:cNvPr id="56" name="Rectangle 55"/>
           <p:cNvSpPr/>
           <p:nvPr/>
         </p:nvSpPr>
@@ -7228,7 +7252,7 @@
       </p:sp>
       <p:sp>
         <p:nvSpPr>
-          <p:cNvPr id="56" name="Rectangle 55"/>
+          <p:cNvPr id="57" name="Rectangle 56"/>
           <p:cNvSpPr/>
           <p:nvPr/>
         </p:nvSpPr>
@@ -7295,7 +7319,7 @@
       </p:sp>
       <p:sp>
         <p:nvSpPr>
-          <p:cNvPr id="57" name="Rectangle 56"/>
+          <p:cNvPr id="58" name="Rectangle 57"/>
           <p:cNvSpPr/>
           <p:nvPr/>
         </p:nvSpPr>
@@ -7362,7 +7386,7 @@
       </p:sp>
       <p:sp>
         <p:nvSpPr>
-          <p:cNvPr id="58" name="Rectangle 57"/>
+          <p:cNvPr id="59" name="Rectangle 58"/>
           <p:cNvSpPr/>
           <p:nvPr/>
         </p:nvSpPr>
@@ -7429,7 +7453,7 @@
       </p:sp>
       <p:sp>
         <p:nvSpPr>
-          <p:cNvPr id="59" name="Rectangle 58"/>
+          <p:cNvPr id="60" name="Rectangle 59"/>
           <p:cNvSpPr/>
           <p:nvPr/>
         </p:nvSpPr>
@@ -7496,7 +7520,7 @@
       </p:sp>
       <p:sp>
         <p:nvSpPr>
-          <p:cNvPr id="60" name="Rectangle 59"/>
+          <p:cNvPr id="61" name="Rectangle 60"/>
           <p:cNvSpPr/>
           <p:nvPr/>
         </p:nvSpPr>
@@ -7563,7 +7587,7 @@
       </p:sp>
       <p:sp>
         <p:nvSpPr>
-          <p:cNvPr id="61" name="Rectangle 60"/>
+          <p:cNvPr id="62" name="Rectangle 61"/>
           <p:cNvSpPr/>
           <p:nvPr/>
         </p:nvSpPr>
@@ -7630,7 +7654,7 @@
       </p:sp>
       <p:sp>
         <p:nvSpPr>
-          <p:cNvPr id="62" name="Rectangle 61"/>
+          <p:cNvPr id="63" name="Rectangle 62"/>
           <p:cNvSpPr/>
           <p:nvPr/>
         </p:nvSpPr>
@@ -7697,7 +7721,7 @@
       </p:sp>
       <p:sp>
         <p:nvSpPr>
-          <p:cNvPr id="63" name="Rectangle 62"/>
+          <p:cNvPr id="64" name="Rectangle 63"/>
           <p:cNvSpPr/>
           <p:nvPr/>
         </p:nvSpPr>
@@ -7764,7 +7788,7 @@
       </p:sp>
       <p:sp>
         <p:nvSpPr>
-          <p:cNvPr id="64" name="Rectangle 63"/>
+          <p:cNvPr id="65" name="Rectangle 64"/>
           <p:cNvSpPr/>
           <p:nvPr/>
         </p:nvSpPr>
@@ -7831,7 +7855,7 @@
       </p:sp>
       <p:sp>
         <p:nvSpPr>
-          <p:cNvPr id="65" name="Rectangle 64"/>
+          <p:cNvPr id="66" name="Rectangle 65"/>
           <p:cNvSpPr/>
           <p:nvPr/>
         </p:nvSpPr>
@@ -7898,7 +7922,7 @@
       </p:sp>
       <p:sp>
         <p:nvSpPr>
-          <p:cNvPr id="66" name="Rectangle 65"/>
+          <p:cNvPr id="67" name="Rectangle 66"/>
           <p:cNvSpPr/>
           <p:nvPr/>
         </p:nvSpPr>
@@ -7965,7 +7989,7 @@
       </p:sp>
       <p:sp>
         <p:nvSpPr>
-          <p:cNvPr id="67" name="Rectangle 66"/>
+          <p:cNvPr id="68" name="Rectangle 67"/>
           <p:cNvSpPr/>
           <p:nvPr/>
         </p:nvSpPr>
@@ -8032,7 +8056,7 @@
       </p:sp>
       <p:sp>
         <p:nvSpPr>
-          <p:cNvPr id="68" name="Rectangle 67"/>
+          <p:cNvPr id="69" name="Rectangle 68"/>
           <p:cNvSpPr/>
           <p:nvPr/>
         </p:nvSpPr>
@@ -8099,7 +8123,7 @@
       </p:sp>
       <p:sp>
         <p:nvSpPr>
-          <p:cNvPr id="69" name="Rectangle 68"/>
+          <p:cNvPr id="70" name="Rectangle 69"/>
           <p:cNvSpPr/>
           <p:nvPr/>
         </p:nvSpPr>
@@ -8166,7 +8190,7 @@
       </p:sp>
       <p:sp>
         <p:nvSpPr>
-          <p:cNvPr id="70" name="Rectangle 69"/>
+          <p:cNvPr id="71" name="Rectangle 70"/>
           <p:cNvSpPr/>
           <p:nvPr/>
         </p:nvSpPr>
@@ -8233,7 +8257,7 @@
       </p:sp>
       <p:sp>
         <p:nvSpPr>
-          <p:cNvPr id="71" name="Rectangle 70"/>
+          <p:cNvPr id="72" name="Rectangle 71"/>
           <p:cNvSpPr/>
           <p:nvPr/>
         </p:nvSpPr>
@@ -8300,7 +8324,7 @@
       </p:sp>
       <p:sp>
         <p:nvSpPr>
-          <p:cNvPr id="72" name="Rectangle 71"/>
+          <p:cNvPr id="73" name="Rectangle 72"/>
           <p:cNvSpPr/>
           <p:nvPr/>
         </p:nvSpPr>
@@ -8367,7 +8391,7 @@
       </p:sp>
       <p:sp>
         <p:nvSpPr>
-          <p:cNvPr id="73" name="Rectangle 72"/>
+          <p:cNvPr id="74" name="Rectangle 73"/>
           <p:cNvSpPr/>
           <p:nvPr/>
         </p:nvSpPr>
@@ -8434,7 +8458,7 @@
       </p:sp>
       <p:sp>
         <p:nvSpPr>
-          <p:cNvPr id="74" name="Rectangle 73"/>
+          <p:cNvPr id="75" name="Rectangle 74"/>
           <p:cNvSpPr/>
           <p:nvPr/>
         </p:nvSpPr>
@@ -8501,7 +8525,7 @@
       </p:sp>
       <p:sp>
         <p:nvSpPr>
-          <p:cNvPr id="75" name="Rectangle 74"/>
+          <p:cNvPr id="76" name="Rectangle 75"/>
           <p:cNvSpPr/>
           <p:nvPr/>
         </p:nvSpPr>
@@ -8568,7 +8592,7 @@
       </p:sp>
       <p:sp>
         <p:nvSpPr>
-          <p:cNvPr id="76" name="Rectangle 75"/>
+          <p:cNvPr id="77" name="Rectangle 76"/>
           <p:cNvSpPr/>
           <p:nvPr/>
         </p:nvSpPr>
@@ -8635,7 +8659,7 @@
       </p:sp>
       <p:sp>
         <p:nvSpPr>
-          <p:cNvPr id="77" name="Rectangle 76"/>
+          <p:cNvPr id="78" name="Rectangle 77"/>
           <p:cNvSpPr/>
           <p:nvPr/>
         </p:nvSpPr>
@@ -8702,7 +8726,7 @@
       </p:sp>
       <p:sp>
         <p:nvSpPr>
-          <p:cNvPr id="78" name="Rectangle 77"/>
+          <p:cNvPr id="79" name="Rectangle 78"/>
           <p:cNvSpPr/>
           <p:nvPr/>
         </p:nvSpPr>
@@ -8769,7 +8793,7 @@
       </p:sp>
       <p:sp>
         <p:nvSpPr>
-          <p:cNvPr id="79" name="Rectangle 78"/>
+          <p:cNvPr id="80" name="Rectangle 79"/>
           <p:cNvSpPr/>
           <p:nvPr/>
         </p:nvSpPr>
@@ -8836,7 +8860,7 @@
       </p:sp>
       <p:sp>
         <p:nvSpPr>
-          <p:cNvPr id="80" name="Rectangle 79"/>
+          <p:cNvPr id="81" name="Rectangle 80"/>
           <p:cNvSpPr/>
           <p:nvPr/>
         </p:nvSpPr>
@@ -8903,7 +8927,7 @@
       </p:sp>
       <p:sp>
         <p:nvSpPr>
-          <p:cNvPr id="81" name="Rectangle 80"/>
+          <p:cNvPr id="82" name="Rectangle 81"/>
           <p:cNvSpPr/>
           <p:nvPr/>
         </p:nvSpPr>
@@ -8970,7 +8994,7 @@
       </p:sp>
       <p:sp>
         <p:nvSpPr>
-          <p:cNvPr id="82" name="Rectangle 81"/>
+          <p:cNvPr id="83" name="Rectangle 82"/>
           <p:cNvSpPr/>
           <p:nvPr/>
         </p:nvSpPr>
@@ -9037,7 +9061,7 @@
       </p:sp>
       <p:sp>
         <p:nvSpPr>
-          <p:cNvPr id="83" name="Rectangle 82"/>
+          <p:cNvPr id="84" name="Rectangle 83"/>
           <p:cNvSpPr/>
           <p:nvPr/>
         </p:nvSpPr>
@@ -9104,7 +9128,7 @@
       </p:sp>
       <p:sp>
         <p:nvSpPr>
-          <p:cNvPr id="84" name="Rectangle 83"/>
+          <p:cNvPr id="85" name="Rectangle 84"/>
           <p:cNvSpPr/>
           <p:nvPr/>
         </p:nvSpPr>
@@ -9171,7 +9195,7 @@
       </p:sp>
       <p:sp>
         <p:nvSpPr>
-          <p:cNvPr id="85" name="Rectangle 84"/>
+          <p:cNvPr id="86" name="Rectangle 85"/>
           <p:cNvSpPr/>
           <p:nvPr/>
         </p:nvSpPr>
@@ -9238,7 +9262,7 @@
       </p:sp>
       <p:sp>
         <p:nvSpPr>
-          <p:cNvPr id="86" name="Rectangle 85"/>
+          <p:cNvPr id="87" name="Rectangle 86"/>
           <p:cNvSpPr/>
           <p:nvPr/>
         </p:nvSpPr>
@@ -9305,7 +9329,7 @@
       </p:sp>
       <p:sp>
         <p:nvSpPr>
-          <p:cNvPr id="87" name="Rectangle 86"/>
+          <p:cNvPr id="88" name="Rectangle 87"/>
           <p:cNvSpPr/>
           <p:nvPr/>
         </p:nvSpPr>
@@ -9372,7 +9396,7 @@
       </p:sp>
       <p:sp>
         <p:nvSpPr>
-          <p:cNvPr id="88" name="Rectangle 87"/>
+          <p:cNvPr id="89" name="Rectangle 88"/>
           <p:cNvSpPr/>
           <p:nvPr/>
         </p:nvSpPr>
@@ -9439,7 +9463,7 @@
       </p:sp>
       <p:sp>
         <p:nvSpPr>
-          <p:cNvPr id="89" name="Rectangle 88"/>
+          <p:cNvPr id="90" name="Rectangle 89"/>
           <p:cNvSpPr/>
           <p:nvPr/>
         </p:nvSpPr>
@@ -9506,7 +9530,7 @@
       </p:sp>
       <p:sp>
         <p:nvSpPr>
-          <p:cNvPr id="90" name="Rectangle 89"/>
+          <p:cNvPr id="91" name="Rectangle 90"/>
           <p:cNvSpPr/>
           <p:nvPr/>
         </p:nvSpPr>
@@ -9573,7 +9597,7 @@
       </p:sp>
       <p:sp>
         <p:nvSpPr>
-          <p:cNvPr id="91" name="Rectangle 90"/>
+          <p:cNvPr id="92" name="Rectangle 91"/>
           <p:cNvSpPr/>
           <p:nvPr/>
         </p:nvSpPr>
@@ -9640,7 +9664,7 @@
       </p:sp>
       <p:cxnSp>
         <p:nvCxnSpPr>
-          <p:cNvPr id="92" name="Connector 91"/>
+          <p:cNvPr id="93" name="Connector 92"/>
           <p:cNvCxnSpPr/>
           <p:nvPr/>
         </p:nvCxnSpPr>
@@ -9676,7 +9700,7 @@
       </p:cxnSp>
       <p:cxnSp>
         <p:nvCxnSpPr>
-          <p:cNvPr id="93" name="Connector 92"/>
+          <p:cNvPr id="94" name="Connector 93"/>
           <p:cNvCxnSpPr/>
           <p:nvPr/>
         </p:nvCxnSpPr>
@@ -9712,7 +9736,7 @@
       </p:cxnSp>
       <p:sp>
         <p:nvSpPr>
-          <p:cNvPr id="94" name="Rectangle 93"/>
+          <p:cNvPr id="95" name="Rectangle 94"/>
           <p:cNvSpPr/>
           <p:nvPr/>
         </p:nvSpPr>
@@ -9758,7 +9782,7 @@
       </p:sp>
       <p:sp>
         <p:nvSpPr>
-          <p:cNvPr id="95" name="TextBox 94"/>
+          <p:cNvPr id="96" name="TextBox 95"/>
           <p:cNvSpPr txBox="1"/>
           <p:nvPr/>
         </p:nvSpPr>
@@ -9803,7 +9827,7 @@
       </p:sp>
       <p:sp>
         <p:nvSpPr>
-          <p:cNvPr id="96" name="TextBox 95"/>
+          <p:cNvPr id="97" name="TextBox 96"/>
           <p:cNvSpPr txBox="1"/>
           <p:nvPr/>
         </p:nvSpPr>
@@ -9848,7 +9872,7 @@
       </p:sp>
       <p:cxnSp>
         <p:nvCxnSpPr>
-          <p:cNvPr id="97" name="Connector 96"/>
+          <p:cNvPr id="98" name="Connector 97"/>
           <p:cNvCxnSpPr/>
           <p:nvPr/>
         </p:nvCxnSpPr>
@@ -9883,7 +9907,7 @@
       </p:cxnSp>
       <p:sp>
         <p:nvSpPr>
-          <p:cNvPr id="98" name="TextBox 97"/>
+          <p:cNvPr id="99" name="TextBox 98"/>
           <p:cNvSpPr txBox="1"/>
           <p:nvPr/>
         </p:nvSpPr>
@@ -9928,7 +9952,7 @@
       </p:sp>
       <p:sp>
         <p:nvSpPr>
-          <p:cNvPr id="99" name="TextBox 98"/>
+          <p:cNvPr id="100" name="TextBox 99"/>
           <p:cNvSpPr txBox="1"/>
           <p:nvPr/>
         </p:nvSpPr>
@@ -9973,7 +9997,7 @@
       </p:sp>
       <p:cxnSp>
         <p:nvCxnSpPr>
-          <p:cNvPr id="100" name="Connector 99"/>
+          <p:cNvPr id="101" name="Connector 100"/>
           <p:cNvCxnSpPr/>
           <p:nvPr/>
         </p:nvCxnSpPr>
@@ -10008,7 +10032,7 @@
       </p:cxnSp>
       <p:sp>
         <p:nvSpPr>
-          <p:cNvPr id="101" name="TextBox 100"/>
+          <p:cNvPr id="102" name="TextBox 101"/>
           <p:cNvSpPr txBox="1"/>
           <p:nvPr/>
         </p:nvSpPr>
@@ -10053,7 +10077,7 @@
       </p:sp>
       <p:sp>
         <p:nvSpPr>
-          <p:cNvPr id="102" name="TextBox 101"/>
+          <p:cNvPr id="103" name="TextBox 102"/>
           <p:cNvSpPr txBox="1"/>
           <p:nvPr/>
         </p:nvSpPr>
@@ -10098,7 +10122,7 @@
       </p:sp>
       <p:cxnSp>
         <p:nvCxnSpPr>
-          <p:cNvPr id="103" name="Connector 102"/>
+          <p:cNvPr id="104" name="Connector 103"/>
           <p:cNvCxnSpPr/>
           <p:nvPr/>
         </p:nvCxnSpPr>
@@ -10133,7 +10157,7 @@
       </p:cxnSp>
       <p:sp>
         <p:nvSpPr>
-          <p:cNvPr id="104" name="TextBox 103"/>
+          <p:cNvPr id="105" name="TextBox 104"/>
           <p:cNvSpPr txBox="1"/>
           <p:nvPr/>
         </p:nvSpPr>
@@ -10272,7 +10296,7 @@
       </p:sp>
       <p:sp>
         <p:nvSpPr>
-          <p:cNvPr id="105" name="TextBox 104"/>
+          <p:cNvPr id="106" name="TextBox 105"/>
           <p:cNvSpPr txBox="1"/>
           <p:nvPr/>
         </p:nvSpPr>
@@ -10393,7 +10417,7 @@
       </p:sp>
       <p:sp>
         <p:nvSpPr>
-          <p:cNvPr id="106" name="TextBox 105"/>
+          <p:cNvPr id="107" name="TextBox 106"/>
           <p:cNvSpPr txBox="1"/>
           <p:nvPr/>
         </p:nvSpPr>
@@ -10496,7 +10520,7 @@
       </p:sp>
       <p:cxnSp>
         <p:nvCxnSpPr>
-          <p:cNvPr id="107" name="Connector 106"/>
+          <p:cNvPr id="108" name="Connector 107"/>
           <p:cNvCxnSpPr/>
           <p:nvPr/>
         </p:nvCxnSpPr>
@@ -10531,7 +10555,7 @@
       </p:cxnSp>
       <p:sp>
         <p:nvSpPr>
-          <p:cNvPr id="108" name="TextBox 107"/>
+          <p:cNvPr id="109" name="TextBox 108"/>
           <p:cNvSpPr txBox="1"/>
           <p:nvPr/>
         </p:nvSpPr>
@@ -10573,7 +10597,7 @@
       </p:sp>
       <p:sp>
         <p:nvSpPr>
-          <p:cNvPr id="109" name="TextBox 108"/>
+          <p:cNvPr id="110" name="TextBox 109"/>
           <p:cNvSpPr txBox="1"/>
           <p:nvPr/>
         </p:nvSpPr>

--- a/eval/out/gates_slide5.pptx
+++ b/eval/out/gates_slide5.pptx
@@ -3128,8 +3128,8 @@
         </p:nvSpPr>
         <p:spPr>
           <a:xfrm>
-            <a:off x="411480" y="511423"/>
-            <a:ext cx="11369040" cy="303033"/>
+            <a:off x="411480" y="274320"/>
+            <a:ext cx="11369040" cy="310608"/>
           </a:xfrm>
           <a:prstGeom prst="rect">
             <a:avLst/>
@@ -3144,7 +3144,7 @@
           <a:p>
             <a:pPr algn="l">
               <a:lnSpc>
-                <a:spcPts val="2386"/>
+                <a:spcPts val="2445"/>
               </a:lnSpc>
               <a:spcBef>
                 <a:spcPts val="0"/>
@@ -3281,8 +3281,8 @@
         </p:nvSpPr>
         <p:spPr>
           <a:xfrm>
-            <a:off x="411480" y="6193210"/>
-            <a:ext cx="11369040" cy="143582"/>
+            <a:off x="411480" y="6189621"/>
+            <a:ext cx="11369040" cy="147171"/>
           </a:xfrm>
           <a:prstGeom prst="rect">
             <a:avLst/>
@@ -3297,7 +3297,7 @@
           <a:p>
             <a:pPr algn="l">
               <a:lnSpc>
-                <a:spcPts val="1130"/>
+                <a:spcPts val="1158"/>
               </a:lnSpc>
               <a:spcBef>
                 <a:spcPts val="0"/>
@@ -3417,7 +3417,7 @@
         <p:spPr>
           <a:xfrm>
             <a:off x="1874520" y="1051560"/>
-            <a:ext cx="3277616" cy="205496"/>
+            <a:ext cx="3277616" cy="209719"/>
           </a:xfrm>
           <a:prstGeom prst="rect">
             <a:avLst/>
@@ -3479,7 +3479,7 @@
         <p:spPr>
           <a:xfrm>
             <a:off x="5188712" y="1051560"/>
-            <a:ext cx="3277616" cy="205496"/>
+            <a:ext cx="3277616" cy="209719"/>
           </a:xfrm>
           <a:prstGeom prst="rect">
             <a:avLst/>
@@ -3541,7 +3541,7 @@
         <p:spPr>
           <a:xfrm>
             <a:off x="8502904" y="1051560"/>
-            <a:ext cx="3277616" cy="205496"/>
+            <a:ext cx="3277616" cy="209719"/>
           </a:xfrm>
           <a:prstGeom prst="rect">
             <a:avLst/>
@@ -3602,7 +3602,7 @@
         </p:nvSpPr>
         <p:spPr>
           <a:xfrm>
-            <a:off x="411480" y="1399818"/>
+            <a:off x="411480" y="1402715"/>
             <a:ext cx="1426464" cy="566928"/>
           </a:xfrm>
           <a:prstGeom prst="homePlate">
@@ -3638,7 +3638,7 @@
           <a:p>
             <a:pPr algn="ctr">
               <a:lnSpc>
-                <a:spcPts val="1130"/>
+                <a:spcPts val="1158"/>
               </a:lnSpc>
               <a:spcBef>
                 <a:spcPts val="0"/>
@@ -3676,8 +3676,8 @@
         </p:nvSpPr>
         <p:spPr>
           <a:xfrm>
-            <a:off x="1874520" y="1293632"/>
-            <a:ext cx="1092539" cy="168920"/>
+            <a:off x="1874520" y="1297855"/>
+            <a:ext cx="1092539" cy="173143"/>
           </a:xfrm>
           <a:prstGeom prst="rect">
             <a:avLst/>
@@ -3692,7 +3692,7 @@
           <a:p>
             <a:pPr algn="ctr">
               <a:lnSpc>
-                <a:spcPts val="1330"/>
+                <a:spcPts val="1363"/>
               </a:lnSpc>
               <a:spcBef>
                 <a:spcPts val="0"/>
@@ -3721,8 +3721,8 @@
         </p:nvSpPr>
         <p:spPr>
           <a:xfrm>
-            <a:off x="1874520" y="1485412"/>
-            <a:ext cx="1092539" cy="253380"/>
+            <a:off x="1874520" y="1493858"/>
+            <a:ext cx="1092539" cy="259714"/>
           </a:xfrm>
           <a:prstGeom prst="rect">
             <a:avLst/>
@@ -3737,7 +3737,7 @@
           <a:p>
             <a:pPr algn="ctr">
               <a:lnSpc>
-                <a:spcPts val="1995"/>
+                <a:spcPts val="2044"/>
               </a:lnSpc>
               <a:spcBef>
                 <a:spcPts val="0"/>
@@ -3766,7 +3766,7 @@
         </p:nvCxnSpPr>
         <p:spPr>
           <a:xfrm>
-            <a:off x="2093028" y="1758858"/>
+            <a:off x="2093028" y="1773638"/>
             <a:ext cx="655523" cy="0"/>
           </a:xfrm>
           <a:prstGeom prst="line">
@@ -3801,8 +3801,8 @@
         </p:nvSpPr>
         <p:spPr>
           <a:xfrm>
-            <a:off x="2967059" y="1293632"/>
-            <a:ext cx="1092539" cy="168920"/>
+            <a:off x="2967059" y="1297855"/>
+            <a:ext cx="1092539" cy="173143"/>
           </a:xfrm>
           <a:prstGeom prst="rect">
             <a:avLst/>
@@ -3817,7 +3817,7 @@
           <a:p>
             <a:pPr algn="ctr">
               <a:lnSpc>
-                <a:spcPts val="1330"/>
+                <a:spcPts val="1363"/>
               </a:lnSpc>
               <a:spcBef>
                 <a:spcPts val="0"/>
@@ -3846,8 +3846,8 @@
         </p:nvSpPr>
         <p:spPr>
           <a:xfrm>
-            <a:off x="2967059" y="1485412"/>
-            <a:ext cx="1092539" cy="253380"/>
+            <a:off x="2967059" y="1493858"/>
+            <a:ext cx="1092539" cy="259714"/>
           </a:xfrm>
           <a:prstGeom prst="rect">
             <a:avLst/>
@@ -3862,7 +3862,7 @@
           <a:p>
             <a:pPr algn="ctr">
               <a:lnSpc>
-                <a:spcPts val="1995"/>
+                <a:spcPts val="2044"/>
               </a:lnSpc>
               <a:spcBef>
                 <a:spcPts val="0"/>
@@ -3891,7 +3891,7 @@
         </p:nvCxnSpPr>
         <p:spPr>
           <a:xfrm>
-            <a:off x="3185567" y="1758858"/>
+            <a:off x="3185567" y="1773638"/>
             <a:ext cx="655523" cy="0"/>
           </a:xfrm>
           <a:prstGeom prst="line">
@@ -3926,8 +3926,8 @@
         </p:nvSpPr>
         <p:spPr>
           <a:xfrm>
-            <a:off x="4059598" y="1293632"/>
-            <a:ext cx="1092538" cy="168920"/>
+            <a:off x="4059598" y="1297855"/>
+            <a:ext cx="1092538" cy="173143"/>
           </a:xfrm>
           <a:prstGeom prst="rect">
             <a:avLst/>
@@ -3942,7 +3942,7 @@
           <a:p>
             <a:pPr algn="ctr">
               <a:lnSpc>
-                <a:spcPts val="1330"/>
+                <a:spcPts val="1363"/>
               </a:lnSpc>
               <a:spcBef>
                 <a:spcPts val="0"/>
@@ -3971,8 +3971,8 @@
         </p:nvSpPr>
         <p:spPr>
           <a:xfrm>
-            <a:off x="4059598" y="1485412"/>
-            <a:ext cx="1092538" cy="253380"/>
+            <a:off x="4059598" y="1493858"/>
+            <a:ext cx="1092538" cy="259714"/>
           </a:xfrm>
           <a:prstGeom prst="rect">
             <a:avLst/>
@@ -3987,7 +3987,7 @@
           <a:p>
             <a:pPr algn="ctr">
               <a:lnSpc>
-                <a:spcPts val="1995"/>
+                <a:spcPts val="2044"/>
               </a:lnSpc>
               <a:spcBef>
                 <a:spcPts val="0"/>
@@ -4016,7 +4016,7 @@
         </p:nvCxnSpPr>
         <p:spPr>
           <a:xfrm>
-            <a:off x="4278105" y="1758858"/>
+            <a:off x="4278105" y="1773638"/>
             <a:ext cx="655523" cy="0"/>
           </a:xfrm>
           <a:prstGeom prst="line">
@@ -4051,8 +4051,8 @@
         </p:nvSpPr>
         <p:spPr>
           <a:xfrm>
-            <a:off x="5188712" y="1293632"/>
-            <a:ext cx="1092539" cy="168920"/>
+            <a:off x="5188712" y="1297855"/>
+            <a:ext cx="1092539" cy="173143"/>
           </a:xfrm>
           <a:prstGeom prst="rect">
             <a:avLst/>
@@ -4067,7 +4067,7 @@
           <a:p>
             <a:pPr algn="ctr">
               <a:lnSpc>
-                <a:spcPts val="1330"/>
+                <a:spcPts val="1363"/>
               </a:lnSpc>
               <a:spcBef>
                 <a:spcPts val="0"/>
@@ -4096,8 +4096,8 @@
         </p:nvSpPr>
         <p:spPr>
           <a:xfrm>
-            <a:off x="5188712" y="1485412"/>
-            <a:ext cx="1092539" cy="253380"/>
+            <a:off x="5188712" y="1493858"/>
+            <a:ext cx="1092539" cy="259714"/>
           </a:xfrm>
           <a:prstGeom prst="rect">
             <a:avLst/>
@@ -4112,7 +4112,7 @@
           <a:p>
             <a:pPr algn="ctr">
               <a:lnSpc>
-                <a:spcPts val="1995"/>
+                <a:spcPts val="2044"/>
               </a:lnSpc>
               <a:spcBef>
                 <a:spcPts val="0"/>
@@ -4141,7 +4141,7 @@
         </p:nvCxnSpPr>
         <p:spPr>
           <a:xfrm>
-            <a:off x="5407220" y="1758858"/>
+            <a:off x="5407220" y="1773638"/>
             <a:ext cx="655523" cy="0"/>
           </a:xfrm>
           <a:prstGeom prst="line">
@@ -4176,8 +4176,8 @@
         </p:nvSpPr>
         <p:spPr>
           <a:xfrm>
-            <a:off x="6281251" y="1293632"/>
-            <a:ext cx="1092539" cy="168920"/>
+            <a:off x="6281251" y="1297855"/>
+            <a:ext cx="1092539" cy="173143"/>
           </a:xfrm>
           <a:prstGeom prst="rect">
             <a:avLst/>
@@ -4192,7 +4192,7 @@
           <a:p>
             <a:pPr algn="ctr">
               <a:lnSpc>
-                <a:spcPts val="1330"/>
+                <a:spcPts val="1363"/>
               </a:lnSpc>
               <a:spcBef>
                 <a:spcPts val="0"/>
@@ -4221,8 +4221,8 @@
         </p:nvSpPr>
         <p:spPr>
           <a:xfrm>
-            <a:off x="6281251" y="1485412"/>
-            <a:ext cx="1092539" cy="253380"/>
+            <a:off x="6281251" y="1493858"/>
+            <a:ext cx="1092539" cy="259714"/>
           </a:xfrm>
           <a:prstGeom prst="rect">
             <a:avLst/>
@@ -4237,7 +4237,7 @@
           <a:p>
             <a:pPr algn="ctr">
               <a:lnSpc>
-                <a:spcPts val="1995"/>
+                <a:spcPts val="2044"/>
               </a:lnSpc>
               <a:spcBef>
                 <a:spcPts val="0"/>
@@ -4266,7 +4266,7 @@
         </p:nvCxnSpPr>
         <p:spPr>
           <a:xfrm>
-            <a:off x="6499759" y="1758858"/>
+            <a:off x="6499759" y="1773638"/>
             <a:ext cx="655523" cy="0"/>
           </a:xfrm>
           <a:prstGeom prst="line">
@@ -4301,8 +4301,8 @@
         </p:nvSpPr>
         <p:spPr>
           <a:xfrm>
-            <a:off x="7373790" y="1293632"/>
-            <a:ext cx="1092538" cy="168920"/>
+            <a:off x="7373790" y="1297855"/>
+            <a:ext cx="1092538" cy="173143"/>
           </a:xfrm>
           <a:prstGeom prst="rect">
             <a:avLst/>
@@ -4317,7 +4317,7 @@
           <a:p>
             <a:pPr algn="ctr">
               <a:lnSpc>
-                <a:spcPts val="1330"/>
+                <a:spcPts val="1363"/>
               </a:lnSpc>
               <a:spcBef>
                 <a:spcPts val="0"/>
@@ -4346,8 +4346,8 @@
         </p:nvSpPr>
         <p:spPr>
           <a:xfrm>
-            <a:off x="7373790" y="1485412"/>
-            <a:ext cx="1092538" cy="253380"/>
+            <a:off x="7373790" y="1493858"/>
+            <a:ext cx="1092538" cy="259714"/>
           </a:xfrm>
           <a:prstGeom prst="rect">
             <a:avLst/>
@@ -4362,7 +4362,7 @@
           <a:p>
             <a:pPr algn="ctr">
               <a:lnSpc>
-                <a:spcPts val="1995"/>
+                <a:spcPts val="2044"/>
               </a:lnSpc>
               <a:spcBef>
                 <a:spcPts val="0"/>
@@ -4391,7 +4391,7 @@
         </p:nvCxnSpPr>
         <p:spPr>
           <a:xfrm>
-            <a:off x="7592297" y="1758858"/>
+            <a:off x="7592297" y="1773638"/>
             <a:ext cx="655523" cy="0"/>
           </a:xfrm>
           <a:prstGeom prst="line">
@@ -4426,8 +4426,8 @@
         </p:nvSpPr>
         <p:spPr>
           <a:xfrm>
-            <a:off x="8502904" y="1293632"/>
-            <a:ext cx="1092539" cy="168920"/>
+            <a:off x="8502904" y="1297855"/>
+            <a:ext cx="1092539" cy="173143"/>
           </a:xfrm>
           <a:prstGeom prst="rect">
             <a:avLst/>
@@ -4442,7 +4442,7 @@
           <a:p>
             <a:pPr algn="ctr">
               <a:lnSpc>
-                <a:spcPts val="1330"/>
+                <a:spcPts val="1363"/>
               </a:lnSpc>
               <a:spcBef>
                 <a:spcPts val="0"/>
@@ -4471,8 +4471,8 @@
         </p:nvSpPr>
         <p:spPr>
           <a:xfrm>
-            <a:off x="8502904" y="1485412"/>
-            <a:ext cx="1092539" cy="253380"/>
+            <a:off x="8502904" y="1493858"/>
+            <a:ext cx="1092539" cy="259714"/>
           </a:xfrm>
           <a:prstGeom prst="rect">
             <a:avLst/>
@@ -4487,7 +4487,7 @@
           <a:p>
             <a:pPr algn="ctr">
               <a:lnSpc>
-                <a:spcPts val="1995"/>
+                <a:spcPts val="2044"/>
               </a:lnSpc>
               <a:spcBef>
                 <a:spcPts val="0"/>
@@ -4516,7 +4516,7 @@
         </p:nvCxnSpPr>
         <p:spPr>
           <a:xfrm>
-            <a:off x="8721412" y="1758858"/>
+            <a:off x="8721412" y="1773638"/>
             <a:ext cx="655523" cy="0"/>
           </a:xfrm>
           <a:prstGeom prst="line">
@@ -4551,8 +4551,8 @@
         </p:nvSpPr>
         <p:spPr>
           <a:xfrm>
-            <a:off x="9595443" y="1293632"/>
-            <a:ext cx="1092539" cy="168920"/>
+            <a:off x="9595443" y="1297855"/>
+            <a:ext cx="1092539" cy="173143"/>
           </a:xfrm>
           <a:prstGeom prst="rect">
             <a:avLst/>
@@ -4567,7 +4567,7 @@
           <a:p>
             <a:pPr algn="ctr">
               <a:lnSpc>
-                <a:spcPts val="1330"/>
+                <a:spcPts val="1363"/>
               </a:lnSpc>
               <a:spcBef>
                 <a:spcPts val="0"/>
@@ -4596,8 +4596,8 @@
         </p:nvSpPr>
         <p:spPr>
           <a:xfrm>
-            <a:off x="9595443" y="1485412"/>
-            <a:ext cx="1092539" cy="253380"/>
+            <a:off x="9595443" y="1493858"/>
+            <a:ext cx="1092539" cy="259714"/>
           </a:xfrm>
           <a:prstGeom prst="rect">
             <a:avLst/>
@@ -4612,7 +4612,7 @@
           <a:p>
             <a:pPr algn="ctr">
               <a:lnSpc>
-                <a:spcPts val="1995"/>
+                <a:spcPts val="2044"/>
               </a:lnSpc>
               <a:spcBef>
                 <a:spcPts val="0"/>
@@ -4641,7 +4641,7 @@
         </p:nvCxnSpPr>
         <p:spPr>
           <a:xfrm>
-            <a:off x="9813951" y="1758858"/>
+            <a:off x="9813951" y="1773638"/>
             <a:ext cx="655523" cy="0"/>
           </a:xfrm>
           <a:prstGeom prst="line">
@@ -4676,8 +4676,8 @@
         </p:nvSpPr>
         <p:spPr>
           <a:xfrm>
-            <a:off x="10687982" y="1293632"/>
-            <a:ext cx="1092538" cy="168920"/>
+            <a:off x="10687982" y="1297855"/>
+            <a:ext cx="1092538" cy="173143"/>
           </a:xfrm>
           <a:prstGeom prst="rect">
             <a:avLst/>
@@ -4692,7 +4692,7 @@
           <a:p>
             <a:pPr algn="ctr">
               <a:lnSpc>
-                <a:spcPts val="1330"/>
+                <a:spcPts val="1363"/>
               </a:lnSpc>
               <a:spcBef>
                 <a:spcPts val="0"/>
@@ -4721,8 +4721,8 @@
         </p:nvSpPr>
         <p:spPr>
           <a:xfrm>
-            <a:off x="10687982" y="1485412"/>
-            <a:ext cx="1092538" cy="253380"/>
+            <a:off x="10687982" y="1493858"/>
+            <a:ext cx="1092538" cy="259714"/>
           </a:xfrm>
           <a:prstGeom prst="rect">
             <a:avLst/>
@@ -4737,7 +4737,7 @@
           <a:p>
             <a:pPr algn="ctr">
               <a:lnSpc>
-                <a:spcPts val="1995"/>
+                <a:spcPts val="2044"/>
               </a:lnSpc>
               <a:spcBef>
                 <a:spcPts val="0"/>
@@ -4766,7 +4766,7 @@
         </p:nvCxnSpPr>
         <p:spPr>
           <a:xfrm>
-            <a:off x="10906489" y="1758858"/>
+            <a:off x="10906489" y="1773638"/>
             <a:ext cx="655523" cy="0"/>
           </a:xfrm>
           <a:prstGeom prst="line">
@@ -4801,7 +4801,7 @@
         </p:nvSpPr>
         <p:spPr>
           <a:xfrm>
-            <a:off x="411480" y="2237859"/>
+            <a:off x="411480" y="2239160"/>
             <a:ext cx="1426464" cy="566928"/>
           </a:xfrm>
           <a:prstGeom prst="homePlate">
@@ -4837,7 +4837,7 @@
           <a:p>
             <a:pPr algn="ctr">
               <a:lnSpc>
-                <a:spcPts val="1130"/>
+                <a:spcPts val="1158"/>
               </a:lnSpc>
               <a:spcBef>
                 <a:spcPts val="0"/>
@@ -4875,8 +4875,8 @@
         </p:nvSpPr>
         <p:spPr>
           <a:xfrm>
-            <a:off x="1874520" y="2114081"/>
-            <a:ext cx="3277616" cy="506760"/>
+            <a:off x="1874520" y="2115652"/>
+            <a:ext cx="3277616" cy="519429"/>
           </a:xfrm>
           <a:prstGeom prst="rect">
             <a:avLst/>
@@ -4891,7 +4891,7 @@
           <a:p>
             <a:pPr algn="ctr">
               <a:lnSpc>
-                <a:spcPts val="1330"/>
+                <a:spcPts val="1363"/>
               </a:lnSpc>
               <a:spcBef>
                 <a:spcPts val="0"/>
@@ -4967,7 +4967,7 @@
           <a:p>
             <a:pPr algn="ctr">
               <a:lnSpc>
-                <a:spcPts val="1330"/>
+                <a:spcPts val="1363"/>
               </a:lnSpc>
               <a:spcBef>
                 <a:spcPts val="0"/>
@@ -5088,7 +5088,7 @@
           <a:p>
             <a:pPr algn="ctr">
               <a:lnSpc>
-                <a:spcPts val="1330"/>
+                <a:spcPts val="1363"/>
               </a:lnSpc>
               <a:spcBef>
                 <a:spcPts val="0"/>
@@ -5135,8 +5135,8 @@
         </p:nvSpPr>
         <p:spPr>
           <a:xfrm>
-            <a:off x="5188712" y="2114081"/>
-            <a:ext cx="3277616" cy="506760"/>
+            <a:off x="5188712" y="2115652"/>
+            <a:ext cx="3277616" cy="519429"/>
           </a:xfrm>
           <a:prstGeom prst="rect">
             <a:avLst/>
@@ -5151,7 +5151,7 @@
           <a:p>
             <a:pPr algn="ctr">
               <a:lnSpc>
-                <a:spcPts val="1330"/>
+                <a:spcPts val="1363"/>
               </a:lnSpc>
               <a:spcBef>
                 <a:spcPts val="0"/>
@@ -5227,7 +5227,7 @@
           <a:p>
             <a:pPr algn="ctr">
               <a:lnSpc>
-                <a:spcPts val="1330"/>
+                <a:spcPts val="1363"/>
               </a:lnSpc>
               <a:spcBef>
                 <a:spcPts val="0"/>
@@ -5348,7 +5348,7 @@
           <a:p>
             <a:pPr algn="ctr">
               <a:lnSpc>
-                <a:spcPts val="1330"/>
+                <a:spcPts val="1363"/>
               </a:lnSpc>
               <a:spcBef>
                 <a:spcPts val="0"/>
@@ -5395,8 +5395,8 @@
         </p:nvSpPr>
         <p:spPr>
           <a:xfrm>
-            <a:off x="8502904" y="2114081"/>
-            <a:ext cx="3277616" cy="506760"/>
+            <a:off x="8502904" y="2115652"/>
+            <a:ext cx="3277616" cy="519429"/>
           </a:xfrm>
           <a:prstGeom prst="rect">
             <a:avLst/>
@@ -5411,7 +5411,7 @@
           <a:p>
             <a:pPr algn="ctr">
               <a:lnSpc>
-                <a:spcPts val="1330"/>
+                <a:spcPts val="1363"/>
               </a:lnSpc>
               <a:spcBef>
                 <a:spcPts val="0"/>
@@ -5487,7 +5487,7 @@
           <a:p>
             <a:pPr algn="ctr">
               <a:lnSpc>
-                <a:spcPts val="1330"/>
+                <a:spcPts val="1363"/>
               </a:lnSpc>
               <a:spcBef>
                 <a:spcPts val="0"/>
@@ -5608,7 +5608,7 @@
           <a:p>
             <a:pPr algn="ctr">
               <a:lnSpc>
-                <a:spcPts val="1330"/>
+                <a:spcPts val="1363"/>
               </a:lnSpc>
               <a:spcBef>
                 <a:spcPts val="0"/>
@@ -5655,7 +5655,7 @@
         </p:nvSpPr>
         <p:spPr>
           <a:xfrm>
-            <a:off x="411480" y="3009032"/>
+            <a:off x="411480" y="3007682"/>
             <a:ext cx="1426464" cy="566928"/>
           </a:xfrm>
           <a:prstGeom prst="homePlate">
@@ -5691,7 +5691,7 @@
           <a:p>
             <a:pPr algn="ctr">
               <a:lnSpc>
-                <a:spcPts val="1130"/>
+                <a:spcPts val="1158"/>
               </a:lnSpc>
               <a:spcBef>
                 <a:spcPts val="0"/>
@@ -5729,8 +5729,8 @@
         </p:nvSpPr>
         <p:spPr>
           <a:xfrm>
-            <a:off x="1874520" y="2969714"/>
-            <a:ext cx="3277616" cy="337840"/>
+            <a:off x="1874520" y="2970745"/>
+            <a:ext cx="3277616" cy="346286"/>
           </a:xfrm>
           <a:prstGeom prst="rect">
             <a:avLst/>
@@ -5745,7 +5745,7 @@
           <a:p>
             <a:pPr algn="ctr">
               <a:lnSpc>
-                <a:spcPts val="1330"/>
+                <a:spcPts val="1363"/>
               </a:lnSpc>
               <a:spcBef>
                 <a:spcPts val="0"/>
@@ -5857,7 +5857,7 @@
           <a:p>
             <a:pPr algn="ctr">
               <a:lnSpc>
-                <a:spcPts val="1330"/>
+                <a:spcPts val="1363"/>
               </a:lnSpc>
               <a:spcBef>
                 <a:spcPts val="0"/>
@@ -5940,8 +5940,8 @@
         </p:nvSpPr>
         <p:spPr>
           <a:xfrm>
-            <a:off x="5188712" y="2969714"/>
-            <a:ext cx="3277616" cy="337840"/>
+            <a:off x="5188712" y="2970745"/>
+            <a:ext cx="3277616" cy="346286"/>
           </a:xfrm>
           <a:prstGeom prst="rect">
             <a:avLst/>
@@ -5956,7 +5956,7 @@
           <a:p>
             <a:pPr algn="ctr">
               <a:lnSpc>
-                <a:spcPts val="1330"/>
+                <a:spcPts val="1363"/>
               </a:lnSpc>
               <a:spcBef>
                 <a:spcPts val="0"/>
@@ -6068,7 +6068,7 @@
           <a:p>
             <a:pPr algn="ctr">
               <a:lnSpc>
-                <a:spcPts val="1330"/>
+                <a:spcPts val="1363"/>
               </a:lnSpc>
               <a:spcBef>
                 <a:spcPts val="0"/>
@@ -6151,8 +6151,8 @@
         </p:nvSpPr>
         <p:spPr>
           <a:xfrm>
-            <a:off x="8502904" y="2969714"/>
-            <a:ext cx="3277616" cy="337840"/>
+            <a:off x="8502904" y="2970745"/>
+            <a:ext cx="3277616" cy="346286"/>
           </a:xfrm>
           <a:prstGeom prst="rect">
             <a:avLst/>
@@ -6167,7 +6167,7 @@
           <a:p>
             <a:pPr algn="ctr">
               <a:lnSpc>
-                <a:spcPts val="1330"/>
+                <a:spcPts val="1363"/>
               </a:lnSpc>
               <a:spcBef>
                 <a:spcPts val="0"/>
@@ -6279,7 +6279,7 @@
           <a:p>
             <a:pPr algn="ctr">
               <a:lnSpc>
-                <a:spcPts val="1330"/>
+                <a:spcPts val="1363"/>
               </a:lnSpc>
               <a:spcBef>
                 <a:spcPts val="0"/>
@@ -6362,7 +6362,7 @@
         </p:nvSpPr>
         <p:spPr>
           <a:xfrm>
-            <a:off x="411480" y="3868853"/>
+            <a:off x="411480" y="3865695"/>
             <a:ext cx="1426464" cy="566928"/>
           </a:xfrm>
           <a:prstGeom prst="homePlate">
@@ -6398,7 +6398,7 @@
           <a:p>
             <a:pPr algn="ctr">
               <a:lnSpc>
-                <a:spcPts val="1130"/>
+                <a:spcPts val="1158"/>
               </a:lnSpc>
               <a:spcBef>
                 <a:spcPts val="0"/>
@@ -6454,8 +6454,8 @@
         </p:nvSpPr>
         <p:spPr>
           <a:xfrm>
-            <a:off x="1874520" y="3656427"/>
-            <a:ext cx="819404" cy="171014"/>
+            <a:off x="1874520" y="3652695"/>
+            <a:ext cx="819404" cy="174603"/>
           </a:xfrm>
           <a:prstGeom prst="rect">
             <a:avLst/>
@@ -6485,14 +6485,14 @@
           </a:fontRef>
         </p:style>
         <p:txBody>
-          <a:bodyPr rtlCol="0" anchor="ctr" wrap="none" lIns="0" rIns="0" tIns="0" bIns="0">
+          <a:bodyPr rtlCol="0" anchor="ctr" wrap="none" lIns="22860" rIns="22860" tIns="0" bIns="0">
             <a:noAutofit/>
           </a:bodyPr>
           <a:lstStyle/>
           <a:p>
             <a:pPr algn="ctr">
               <a:lnSpc>
-                <a:spcPts val="1130"/>
+                <a:spcPts val="1158"/>
               </a:lnSpc>
               <a:spcBef>
                 <a:spcPts val="0"/>
@@ -6521,8 +6521,8 @@
         </p:nvSpPr>
         <p:spPr>
           <a:xfrm>
-            <a:off x="2693924" y="3656427"/>
-            <a:ext cx="819404" cy="171014"/>
+            <a:off x="2693924" y="3652695"/>
+            <a:ext cx="819404" cy="174603"/>
           </a:xfrm>
           <a:prstGeom prst="rect">
             <a:avLst/>
@@ -6552,14 +6552,14 @@
           </a:fontRef>
         </p:style>
         <p:txBody>
-          <a:bodyPr rtlCol="0" anchor="ctr" wrap="none" lIns="0" rIns="0" tIns="0" bIns="0">
+          <a:bodyPr rtlCol="0" anchor="ctr" wrap="none" lIns="22860" rIns="22860" tIns="0" bIns="0">
             <a:noAutofit/>
           </a:bodyPr>
           <a:lstStyle/>
           <a:p>
             <a:pPr algn="ctr">
               <a:lnSpc>
-                <a:spcPts val="1130"/>
+                <a:spcPts val="1158"/>
               </a:lnSpc>
               <a:spcBef>
                 <a:spcPts val="0"/>
@@ -6588,8 +6588,8 @@
         </p:nvSpPr>
         <p:spPr>
           <a:xfrm>
-            <a:off x="3513328" y="3656427"/>
-            <a:ext cx="819404" cy="171014"/>
+            <a:off x="3513328" y="3652695"/>
+            <a:ext cx="819404" cy="174603"/>
           </a:xfrm>
           <a:prstGeom prst="rect">
             <a:avLst/>
@@ -6619,14 +6619,14 @@
           </a:fontRef>
         </p:style>
         <p:txBody>
-          <a:bodyPr rtlCol="0" anchor="ctr" wrap="none" lIns="0" rIns="0" tIns="0" bIns="0">
+          <a:bodyPr rtlCol="0" anchor="ctr" wrap="none" lIns="22860" rIns="22860" tIns="0" bIns="0">
             <a:noAutofit/>
           </a:bodyPr>
           <a:lstStyle/>
           <a:p>
             <a:pPr algn="ctr">
               <a:lnSpc>
-                <a:spcPts val="1130"/>
+                <a:spcPts val="1158"/>
               </a:lnSpc>
               <a:spcBef>
                 <a:spcPts val="0"/>
@@ -6642,7 +6642,16 @@
                 </a:solidFill>
                 <a:latin typeface="Segoe UI"/>
               </a:rPr>
-              <a:t>State Avg.</a:t>
+              <a:t>State </a:t>
+            </a:r>
+            <a:r>
+              <a:rPr sz="850" b="1" i="0">
+                <a:solidFill>
+                  <a:srgbClr val="2B2B2B"/>
+                </a:solidFill>
+                <a:latin typeface="Segoe UI"/>
+              </a:rPr>
+              <a:t>Avg.</a:t>
             </a:r>
           </a:p>
         </p:txBody>
@@ -6655,8 +6664,8 @@
         </p:nvSpPr>
         <p:spPr>
           <a:xfrm>
-            <a:off x="4332732" y="3656427"/>
-            <a:ext cx="819404" cy="171014"/>
+            <a:off x="4332732" y="3652695"/>
+            <a:ext cx="819404" cy="174603"/>
           </a:xfrm>
           <a:prstGeom prst="rect">
             <a:avLst/>
@@ -6686,14 +6695,14 @@
           </a:fontRef>
         </p:style>
         <p:txBody>
-          <a:bodyPr rtlCol="0" anchor="ctr" wrap="none" lIns="0" rIns="0" tIns="0" bIns="0">
+          <a:bodyPr rtlCol="0" anchor="ctr" wrap="none" lIns="22860" rIns="22860" tIns="0" bIns="0">
             <a:noAutofit/>
           </a:bodyPr>
           <a:lstStyle/>
           <a:p>
             <a:pPr algn="ctr">
               <a:lnSpc>
-                <a:spcPts val="1130"/>
+                <a:spcPts val="1158"/>
               </a:lnSpc>
               <a:spcBef>
                 <a:spcPts val="0"/>
@@ -6722,8 +6731,8 @@
         </p:nvSpPr>
         <p:spPr>
           <a:xfrm>
-            <a:off x="1874520" y="3827441"/>
-            <a:ext cx="819404" cy="171014"/>
+            <a:off x="1874520" y="3827298"/>
+            <a:ext cx="819404" cy="174603"/>
           </a:xfrm>
           <a:prstGeom prst="rect">
             <a:avLst/>
@@ -6753,14 +6762,14 @@
           </a:fontRef>
         </p:style>
         <p:txBody>
-          <a:bodyPr rtlCol="0" anchor="ctr" wrap="none" lIns="0" rIns="0" tIns="0" bIns="0">
+          <a:bodyPr rtlCol="0" anchor="ctr" wrap="none" lIns="22860" rIns="22860" tIns="0" bIns="0">
             <a:noAutofit/>
           </a:bodyPr>
           <a:lstStyle/>
           <a:p>
             <a:pPr algn="ctr">
               <a:lnSpc>
-                <a:spcPts val="1130"/>
+                <a:spcPts val="1158"/>
               </a:lnSpc>
               <a:spcBef>
                 <a:spcPts val="0"/>
@@ -6789,8 +6798,8 @@
         </p:nvSpPr>
         <p:spPr>
           <a:xfrm>
-            <a:off x="2693924" y="3827441"/>
-            <a:ext cx="819404" cy="171014"/>
+            <a:off x="2693924" y="3827298"/>
+            <a:ext cx="819404" cy="174603"/>
           </a:xfrm>
           <a:prstGeom prst="rect">
             <a:avLst/>
@@ -6820,14 +6829,14 @@
           </a:fontRef>
         </p:style>
         <p:txBody>
-          <a:bodyPr rtlCol="0" anchor="ctr" wrap="none" lIns="0" rIns="0" tIns="0" bIns="0">
+          <a:bodyPr rtlCol="0" anchor="ctr" wrap="none" lIns="22860" rIns="22860" tIns="0" bIns="0">
             <a:noAutofit/>
           </a:bodyPr>
           <a:lstStyle/>
           <a:p>
             <a:pPr algn="ctr">
               <a:lnSpc>
-                <a:spcPts val="1130"/>
+                <a:spcPts val="1158"/>
               </a:lnSpc>
               <a:spcBef>
                 <a:spcPts val="0"/>
@@ -6856,8 +6865,8 @@
         </p:nvSpPr>
         <p:spPr>
           <a:xfrm>
-            <a:off x="3513328" y="3827441"/>
-            <a:ext cx="819404" cy="171014"/>
+            <a:off x="3513328" y="3827298"/>
+            <a:ext cx="819404" cy="174603"/>
           </a:xfrm>
           <a:prstGeom prst="rect">
             <a:avLst/>
@@ -6887,14 +6896,14 @@
           </a:fontRef>
         </p:style>
         <p:txBody>
-          <a:bodyPr rtlCol="0" anchor="ctr" wrap="none" lIns="0" rIns="0" tIns="0" bIns="0">
+          <a:bodyPr rtlCol="0" anchor="ctr" wrap="none" lIns="22860" rIns="22860" tIns="0" bIns="0">
             <a:noAutofit/>
           </a:bodyPr>
           <a:lstStyle/>
           <a:p>
             <a:pPr algn="ctr">
               <a:lnSpc>
-                <a:spcPts val="1130"/>
+                <a:spcPts val="1158"/>
               </a:lnSpc>
               <a:spcBef>
                 <a:spcPts val="0"/>
@@ -6923,8 +6932,8 @@
         </p:nvSpPr>
         <p:spPr>
           <a:xfrm>
-            <a:off x="4332732" y="3827441"/>
-            <a:ext cx="819404" cy="171014"/>
+            <a:off x="4332732" y="3827298"/>
+            <a:ext cx="819404" cy="174603"/>
           </a:xfrm>
           <a:prstGeom prst="rect">
             <a:avLst/>
@@ -6954,14 +6963,14 @@
           </a:fontRef>
         </p:style>
         <p:txBody>
-          <a:bodyPr rtlCol="0" anchor="ctr" wrap="none" lIns="0" rIns="0" tIns="0" bIns="0">
+          <a:bodyPr rtlCol="0" anchor="ctr" wrap="none" lIns="22860" rIns="22860" tIns="0" bIns="0">
             <a:noAutofit/>
           </a:bodyPr>
           <a:lstStyle/>
           <a:p>
             <a:pPr algn="ctr">
               <a:lnSpc>
-                <a:spcPts val="1130"/>
+                <a:spcPts val="1158"/>
               </a:lnSpc>
               <a:spcBef>
                 <a:spcPts val="0"/>
@@ -6990,8 +6999,8 @@
         </p:nvSpPr>
         <p:spPr>
           <a:xfrm>
-            <a:off x="1874520" y="3998455"/>
-            <a:ext cx="819404" cy="171014"/>
+            <a:off x="1874520" y="4001901"/>
+            <a:ext cx="819404" cy="174603"/>
           </a:xfrm>
           <a:prstGeom prst="rect">
             <a:avLst/>
@@ -7021,14 +7030,14 @@
           </a:fontRef>
         </p:style>
         <p:txBody>
-          <a:bodyPr rtlCol="0" anchor="ctr" wrap="none" lIns="0" rIns="0" tIns="0" bIns="0">
+          <a:bodyPr rtlCol="0" anchor="ctr" wrap="none" lIns="22860" rIns="22860" tIns="0" bIns="0">
             <a:noAutofit/>
           </a:bodyPr>
           <a:lstStyle/>
           <a:p>
             <a:pPr algn="ctr">
               <a:lnSpc>
-                <a:spcPts val="1130"/>
+                <a:spcPts val="1158"/>
               </a:lnSpc>
               <a:spcBef>
                 <a:spcPts val="0"/>
@@ -7057,8 +7066,8 @@
         </p:nvSpPr>
         <p:spPr>
           <a:xfrm>
-            <a:off x="2693924" y="3998455"/>
-            <a:ext cx="819404" cy="171014"/>
+            <a:off x="2693924" y="4001901"/>
+            <a:ext cx="819404" cy="174603"/>
           </a:xfrm>
           <a:prstGeom prst="rect">
             <a:avLst/>
@@ -7088,14 +7097,14 @@
           </a:fontRef>
         </p:style>
         <p:txBody>
-          <a:bodyPr rtlCol="0" anchor="ctr" wrap="none" lIns="0" rIns="0" tIns="0" bIns="0">
+          <a:bodyPr rtlCol="0" anchor="ctr" wrap="none" lIns="22860" rIns="22860" tIns="0" bIns="0">
             <a:noAutofit/>
           </a:bodyPr>
           <a:lstStyle/>
           <a:p>
             <a:pPr algn="ctr">
               <a:lnSpc>
-                <a:spcPts val="1130"/>
+                <a:spcPts val="1158"/>
               </a:lnSpc>
               <a:spcBef>
                 <a:spcPts val="0"/>
@@ -7124,8 +7133,8 @@
         </p:nvSpPr>
         <p:spPr>
           <a:xfrm>
-            <a:off x="3513328" y="3998455"/>
-            <a:ext cx="819404" cy="171014"/>
+            <a:off x="3513328" y="4001901"/>
+            <a:ext cx="819404" cy="174603"/>
           </a:xfrm>
           <a:prstGeom prst="rect">
             <a:avLst/>
@@ -7155,14 +7164,14 @@
           </a:fontRef>
         </p:style>
         <p:txBody>
-          <a:bodyPr rtlCol="0" anchor="ctr" wrap="none" lIns="0" rIns="0" tIns="0" bIns="0">
+          <a:bodyPr rtlCol="0" anchor="ctr" wrap="none" lIns="22860" rIns="22860" tIns="0" bIns="0">
             <a:noAutofit/>
           </a:bodyPr>
           <a:lstStyle/>
           <a:p>
             <a:pPr algn="ctr">
               <a:lnSpc>
-                <a:spcPts val="1130"/>
+                <a:spcPts val="1158"/>
               </a:lnSpc>
               <a:spcBef>
                 <a:spcPts val="0"/>
@@ -7191,8 +7200,8 @@
         </p:nvSpPr>
         <p:spPr>
           <a:xfrm>
-            <a:off x="4332732" y="3998455"/>
-            <a:ext cx="819404" cy="171014"/>
+            <a:off x="4332732" y="4001901"/>
+            <a:ext cx="819404" cy="174603"/>
           </a:xfrm>
           <a:prstGeom prst="rect">
             <a:avLst/>
@@ -7222,14 +7231,14 @@
           </a:fontRef>
         </p:style>
         <p:txBody>
-          <a:bodyPr rtlCol="0" anchor="ctr" wrap="none" lIns="0" rIns="0" tIns="0" bIns="0">
+          <a:bodyPr rtlCol="0" anchor="ctr" wrap="none" lIns="22860" rIns="22860" tIns="0" bIns="0">
             <a:noAutofit/>
           </a:bodyPr>
           <a:lstStyle/>
           <a:p>
             <a:pPr algn="ctr">
               <a:lnSpc>
-                <a:spcPts val="1130"/>
+                <a:spcPts val="1158"/>
               </a:lnSpc>
               <a:spcBef>
                 <a:spcPts val="0"/>
@@ -7258,8 +7267,8 @@
         </p:nvSpPr>
         <p:spPr>
           <a:xfrm>
-            <a:off x="1874520" y="4169469"/>
-            <a:ext cx="819404" cy="171014"/>
+            <a:off x="1874520" y="4176504"/>
+            <a:ext cx="819404" cy="174603"/>
           </a:xfrm>
           <a:prstGeom prst="rect">
             <a:avLst/>
@@ -7289,14 +7298,14 @@
           </a:fontRef>
         </p:style>
         <p:txBody>
-          <a:bodyPr rtlCol="0" anchor="ctr" wrap="none" lIns="0" rIns="0" tIns="0" bIns="0">
+          <a:bodyPr rtlCol="0" anchor="ctr" wrap="none" lIns="22860" rIns="22860" tIns="0" bIns="0">
             <a:noAutofit/>
           </a:bodyPr>
           <a:lstStyle/>
           <a:p>
             <a:pPr algn="ctr">
               <a:lnSpc>
-                <a:spcPts val="1130"/>
+                <a:spcPts val="1158"/>
               </a:lnSpc>
               <a:spcBef>
                 <a:spcPts val="0"/>
@@ -7325,8 +7334,8 @@
         </p:nvSpPr>
         <p:spPr>
           <a:xfrm>
-            <a:off x="2693924" y="4169469"/>
-            <a:ext cx="819404" cy="171014"/>
+            <a:off x="2693924" y="4176504"/>
+            <a:ext cx="819404" cy="174603"/>
           </a:xfrm>
           <a:prstGeom prst="rect">
             <a:avLst/>
@@ -7356,14 +7365,14 @@
           </a:fontRef>
         </p:style>
         <p:txBody>
-          <a:bodyPr rtlCol="0" anchor="ctr" wrap="none" lIns="0" rIns="0" tIns="0" bIns="0">
+          <a:bodyPr rtlCol="0" anchor="ctr" wrap="none" lIns="22860" rIns="22860" tIns="0" bIns="0">
             <a:noAutofit/>
           </a:bodyPr>
           <a:lstStyle/>
           <a:p>
             <a:pPr algn="ctr">
               <a:lnSpc>
-                <a:spcPts val="1130"/>
+                <a:spcPts val="1158"/>
               </a:lnSpc>
               <a:spcBef>
                 <a:spcPts val="0"/>
@@ -7392,8 +7401,8 @@
         </p:nvSpPr>
         <p:spPr>
           <a:xfrm>
-            <a:off x="3513328" y="4169469"/>
-            <a:ext cx="819404" cy="171014"/>
+            <a:off x="3513328" y="4176504"/>
+            <a:ext cx="819404" cy="174603"/>
           </a:xfrm>
           <a:prstGeom prst="rect">
             <a:avLst/>
@@ -7423,14 +7432,14 @@
           </a:fontRef>
         </p:style>
         <p:txBody>
-          <a:bodyPr rtlCol="0" anchor="ctr" wrap="none" lIns="0" rIns="0" tIns="0" bIns="0">
+          <a:bodyPr rtlCol="0" anchor="ctr" wrap="none" lIns="22860" rIns="22860" tIns="0" bIns="0">
             <a:noAutofit/>
           </a:bodyPr>
           <a:lstStyle/>
           <a:p>
             <a:pPr algn="ctr">
               <a:lnSpc>
-                <a:spcPts val="1130"/>
+                <a:spcPts val="1158"/>
               </a:lnSpc>
               <a:spcBef>
                 <a:spcPts val="0"/>
@@ -7459,8 +7468,8 @@
         </p:nvSpPr>
         <p:spPr>
           <a:xfrm>
-            <a:off x="4332732" y="4169469"/>
-            <a:ext cx="819404" cy="171014"/>
+            <a:off x="4332732" y="4176504"/>
+            <a:ext cx="819404" cy="174603"/>
           </a:xfrm>
           <a:prstGeom prst="rect">
             <a:avLst/>
@@ -7490,14 +7499,14 @@
           </a:fontRef>
         </p:style>
         <p:txBody>
-          <a:bodyPr rtlCol="0" anchor="ctr" wrap="none" lIns="0" rIns="0" tIns="0" bIns="0">
+          <a:bodyPr rtlCol="0" anchor="ctr" wrap="none" lIns="22860" rIns="22860" tIns="0" bIns="0">
             <a:noAutofit/>
           </a:bodyPr>
           <a:lstStyle/>
           <a:p>
             <a:pPr algn="ctr">
               <a:lnSpc>
-                <a:spcPts val="1130"/>
+                <a:spcPts val="1158"/>
               </a:lnSpc>
               <a:spcBef>
                 <a:spcPts val="0"/>
@@ -7526,8 +7535,8 @@
         </p:nvSpPr>
         <p:spPr>
           <a:xfrm>
-            <a:off x="5188712" y="3656427"/>
-            <a:ext cx="819404" cy="171014"/>
+            <a:off x="5188712" y="3652695"/>
+            <a:ext cx="819404" cy="174603"/>
           </a:xfrm>
           <a:prstGeom prst="rect">
             <a:avLst/>
@@ -7557,14 +7566,14 @@
           </a:fontRef>
         </p:style>
         <p:txBody>
-          <a:bodyPr rtlCol="0" anchor="ctr" wrap="none" lIns="0" rIns="0" tIns="0" bIns="0">
+          <a:bodyPr rtlCol="0" anchor="ctr" wrap="none" lIns="22860" rIns="22860" tIns="0" bIns="0">
             <a:noAutofit/>
           </a:bodyPr>
           <a:lstStyle/>
           <a:p>
             <a:pPr algn="ctr">
               <a:lnSpc>
-                <a:spcPts val="1130"/>
+                <a:spcPts val="1158"/>
               </a:lnSpc>
               <a:spcBef>
                 <a:spcPts val="0"/>
@@ -7593,8 +7602,8 @@
         </p:nvSpPr>
         <p:spPr>
           <a:xfrm>
-            <a:off x="6008116" y="3656427"/>
-            <a:ext cx="819404" cy="171014"/>
+            <a:off x="6008116" y="3652695"/>
+            <a:ext cx="819404" cy="174603"/>
           </a:xfrm>
           <a:prstGeom prst="rect">
             <a:avLst/>
@@ -7624,14 +7633,14 @@
           </a:fontRef>
         </p:style>
         <p:txBody>
-          <a:bodyPr rtlCol="0" anchor="ctr" wrap="none" lIns="0" rIns="0" tIns="0" bIns="0">
+          <a:bodyPr rtlCol="0" anchor="ctr" wrap="none" lIns="22860" rIns="22860" tIns="0" bIns="0">
             <a:noAutofit/>
           </a:bodyPr>
           <a:lstStyle/>
           <a:p>
             <a:pPr algn="ctr">
               <a:lnSpc>
-                <a:spcPts val="1130"/>
+                <a:spcPts val="1158"/>
               </a:lnSpc>
               <a:spcBef>
                 <a:spcPts val="0"/>
@@ -7660,8 +7669,8 @@
         </p:nvSpPr>
         <p:spPr>
           <a:xfrm>
-            <a:off x="6827520" y="3656427"/>
-            <a:ext cx="819404" cy="171014"/>
+            <a:off x="6827520" y="3652695"/>
+            <a:ext cx="819404" cy="174603"/>
           </a:xfrm>
           <a:prstGeom prst="rect">
             <a:avLst/>
@@ -7691,14 +7700,14 @@
           </a:fontRef>
         </p:style>
         <p:txBody>
-          <a:bodyPr rtlCol="0" anchor="ctr" wrap="none" lIns="0" rIns="0" tIns="0" bIns="0">
+          <a:bodyPr rtlCol="0" anchor="ctr" wrap="none" lIns="22860" rIns="22860" tIns="0" bIns="0">
             <a:noAutofit/>
           </a:bodyPr>
           <a:lstStyle/>
           <a:p>
             <a:pPr algn="ctr">
               <a:lnSpc>
-                <a:spcPts val="1130"/>
+                <a:spcPts val="1158"/>
               </a:lnSpc>
               <a:spcBef>
                 <a:spcPts val="0"/>
@@ -7714,7 +7723,16 @@
                 </a:solidFill>
                 <a:latin typeface="Segoe UI"/>
               </a:rPr>
-              <a:t>State Avg.</a:t>
+              <a:t>State </a:t>
+            </a:r>
+            <a:r>
+              <a:rPr sz="850" b="1" i="0">
+                <a:solidFill>
+                  <a:srgbClr val="2B2B2B"/>
+                </a:solidFill>
+                <a:latin typeface="Segoe UI"/>
+              </a:rPr>
+              <a:t>Avg.</a:t>
             </a:r>
           </a:p>
         </p:txBody>
@@ -7727,8 +7745,8 @@
         </p:nvSpPr>
         <p:spPr>
           <a:xfrm>
-            <a:off x="7646924" y="3656427"/>
-            <a:ext cx="819404" cy="171014"/>
+            <a:off x="7646924" y="3652695"/>
+            <a:ext cx="819404" cy="174603"/>
           </a:xfrm>
           <a:prstGeom prst="rect">
             <a:avLst/>
@@ -7758,14 +7776,14 @@
           </a:fontRef>
         </p:style>
         <p:txBody>
-          <a:bodyPr rtlCol="0" anchor="ctr" wrap="none" lIns="0" rIns="0" tIns="0" bIns="0">
+          <a:bodyPr rtlCol="0" anchor="ctr" wrap="none" lIns="22860" rIns="22860" tIns="0" bIns="0">
             <a:noAutofit/>
           </a:bodyPr>
           <a:lstStyle/>
           <a:p>
             <a:pPr algn="ctr">
               <a:lnSpc>
-                <a:spcPts val="1130"/>
+                <a:spcPts val="1158"/>
               </a:lnSpc>
               <a:spcBef>
                 <a:spcPts val="0"/>
@@ -7794,8 +7812,8 @@
         </p:nvSpPr>
         <p:spPr>
           <a:xfrm>
-            <a:off x="5188712" y="3827441"/>
-            <a:ext cx="819404" cy="171014"/>
+            <a:off x="5188712" y="3827298"/>
+            <a:ext cx="819404" cy="174603"/>
           </a:xfrm>
           <a:prstGeom prst="rect">
             <a:avLst/>
@@ -7825,14 +7843,14 @@
           </a:fontRef>
         </p:style>
         <p:txBody>
-          <a:bodyPr rtlCol="0" anchor="ctr" wrap="none" lIns="0" rIns="0" tIns="0" bIns="0">
+          <a:bodyPr rtlCol="0" anchor="ctr" wrap="none" lIns="22860" rIns="22860" tIns="0" bIns="0">
             <a:noAutofit/>
           </a:bodyPr>
           <a:lstStyle/>
           <a:p>
             <a:pPr algn="ctr">
               <a:lnSpc>
-                <a:spcPts val="1130"/>
+                <a:spcPts val="1158"/>
               </a:lnSpc>
               <a:spcBef>
                 <a:spcPts val="0"/>
@@ -7861,8 +7879,8 @@
         </p:nvSpPr>
         <p:spPr>
           <a:xfrm>
-            <a:off x="6008116" y="3827441"/>
-            <a:ext cx="819404" cy="171014"/>
+            <a:off x="6008116" y="3827298"/>
+            <a:ext cx="819404" cy="174603"/>
           </a:xfrm>
           <a:prstGeom prst="rect">
             <a:avLst/>
@@ -7892,14 +7910,14 @@
           </a:fontRef>
         </p:style>
         <p:txBody>
-          <a:bodyPr rtlCol="0" anchor="ctr" wrap="none" lIns="0" rIns="0" tIns="0" bIns="0">
+          <a:bodyPr rtlCol="0" anchor="ctr" wrap="none" lIns="22860" rIns="22860" tIns="0" bIns="0">
             <a:noAutofit/>
           </a:bodyPr>
           <a:lstStyle/>
           <a:p>
             <a:pPr algn="ctr">
               <a:lnSpc>
-                <a:spcPts val="1130"/>
+                <a:spcPts val="1158"/>
               </a:lnSpc>
               <a:spcBef>
                 <a:spcPts val="0"/>
@@ -7928,8 +7946,8 @@
         </p:nvSpPr>
         <p:spPr>
           <a:xfrm>
-            <a:off x="6827520" y="3827441"/>
-            <a:ext cx="819404" cy="171014"/>
+            <a:off x="6827520" y="3827298"/>
+            <a:ext cx="819404" cy="174603"/>
           </a:xfrm>
           <a:prstGeom prst="rect">
             <a:avLst/>
@@ -7959,14 +7977,14 @@
           </a:fontRef>
         </p:style>
         <p:txBody>
-          <a:bodyPr rtlCol="0" anchor="ctr" wrap="none" lIns="0" rIns="0" tIns="0" bIns="0">
+          <a:bodyPr rtlCol="0" anchor="ctr" wrap="none" lIns="22860" rIns="22860" tIns="0" bIns="0">
             <a:noAutofit/>
           </a:bodyPr>
           <a:lstStyle/>
           <a:p>
             <a:pPr algn="ctr">
               <a:lnSpc>
-                <a:spcPts val="1130"/>
+                <a:spcPts val="1158"/>
               </a:lnSpc>
               <a:spcBef>
                 <a:spcPts val="0"/>
@@ -7995,8 +8013,8 @@
         </p:nvSpPr>
         <p:spPr>
           <a:xfrm>
-            <a:off x="7646924" y="3827441"/>
-            <a:ext cx="819404" cy="171014"/>
+            <a:off x="7646924" y="3827298"/>
+            <a:ext cx="819404" cy="174603"/>
           </a:xfrm>
           <a:prstGeom prst="rect">
             <a:avLst/>
@@ -8026,14 +8044,14 @@
           </a:fontRef>
         </p:style>
         <p:txBody>
-          <a:bodyPr rtlCol="0" anchor="ctr" wrap="none" lIns="0" rIns="0" tIns="0" bIns="0">
+          <a:bodyPr rtlCol="0" anchor="ctr" wrap="none" lIns="22860" rIns="22860" tIns="0" bIns="0">
             <a:noAutofit/>
           </a:bodyPr>
           <a:lstStyle/>
           <a:p>
             <a:pPr algn="ctr">
               <a:lnSpc>
-                <a:spcPts val="1130"/>
+                <a:spcPts val="1158"/>
               </a:lnSpc>
               <a:spcBef>
                 <a:spcPts val="0"/>
@@ -8062,8 +8080,8 @@
         </p:nvSpPr>
         <p:spPr>
           <a:xfrm>
-            <a:off x="5188712" y="3998455"/>
-            <a:ext cx="819404" cy="171014"/>
+            <a:off x="5188712" y="4001901"/>
+            <a:ext cx="819404" cy="174603"/>
           </a:xfrm>
           <a:prstGeom prst="rect">
             <a:avLst/>
@@ -8093,14 +8111,14 @@
           </a:fontRef>
         </p:style>
         <p:txBody>
-          <a:bodyPr rtlCol="0" anchor="ctr" wrap="none" lIns="0" rIns="0" tIns="0" bIns="0">
+          <a:bodyPr rtlCol="0" anchor="ctr" wrap="none" lIns="22860" rIns="22860" tIns="0" bIns="0">
             <a:noAutofit/>
           </a:bodyPr>
           <a:lstStyle/>
           <a:p>
             <a:pPr algn="ctr">
               <a:lnSpc>
-                <a:spcPts val="1130"/>
+                <a:spcPts val="1158"/>
               </a:lnSpc>
               <a:spcBef>
                 <a:spcPts val="0"/>
@@ -8129,8 +8147,8 @@
         </p:nvSpPr>
         <p:spPr>
           <a:xfrm>
-            <a:off x="6008116" y="3998455"/>
-            <a:ext cx="819404" cy="171014"/>
+            <a:off x="6008116" y="4001901"/>
+            <a:ext cx="819404" cy="174603"/>
           </a:xfrm>
           <a:prstGeom prst="rect">
             <a:avLst/>
@@ -8160,14 +8178,14 @@
           </a:fontRef>
         </p:style>
         <p:txBody>
-          <a:bodyPr rtlCol="0" anchor="ctr" wrap="none" lIns="0" rIns="0" tIns="0" bIns="0">
+          <a:bodyPr rtlCol="0" anchor="ctr" wrap="none" lIns="22860" rIns="22860" tIns="0" bIns="0">
             <a:noAutofit/>
           </a:bodyPr>
           <a:lstStyle/>
           <a:p>
             <a:pPr algn="ctr">
               <a:lnSpc>
-                <a:spcPts val="1130"/>
+                <a:spcPts val="1158"/>
               </a:lnSpc>
               <a:spcBef>
                 <a:spcPts val="0"/>
@@ -8196,8 +8214,8 @@
         </p:nvSpPr>
         <p:spPr>
           <a:xfrm>
-            <a:off x="6827520" y="3998455"/>
-            <a:ext cx="819404" cy="171014"/>
+            <a:off x="6827520" y="4001901"/>
+            <a:ext cx="819404" cy="174603"/>
           </a:xfrm>
           <a:prstGeom prst="rect">
             <a:avLst/>
@@ -8227,14 +8245,14 @@
           </a:fontRef>
         </p:style>
         <p:txBody>
-          <a:bodyPr rtlCol="0" anchor="ctr" wrap="none" lIns="0" rIns="0" tIns="0" bIns="0">
+          <a:bodyPr rtlCol="0" anchor="ctr" wrap="none" lIns="22860" rIns="22860" tIns="0" bIns="0">
             <a:noAutofit/>
           </a:bodyPr>
           <a:lstStyle/>
           <a:p>
             <a:pPr algn="ctr">
               <a:lnSpc>
-                <a:spcPts val="1130"/>
+                <a:spcPts val="1158"/>
               </a:lnSpc>
               <a:spcBef>
                 <a:spcPts val="0"/>
@@ -8263,8 +8281,8 @@
         </p:nvSpPr>
         <p:spPr>
           <a:xfrm>
-            <a:off x="7646924" y="3998455"/>
-            <a:ext cx="819404" cy="171014"/>
+            <a:off x="7646924" y="4001901"/>
+            <a:ext cx="819404" cy="174603"/>
           </a:xfrm>
           <a:prstGeom prst="rect">
             <a:avLst/>
@@ -8294,14 +8312,14 @@
           </a:fontRef>
         </p:style>
         <p:txBody>
-          <a:bodyPr rtlCol="0" anchor="ctr" wrap="none" lIns="0" rIns="0" tIns="0" bIns="0">
+          <a:bodyPr rtlCol="0" anchor="ctr" wrap="none" lIns="22860" rIns="22860" tIns="0" bIns="0">
             <a:noAutofit/>
           </a:bodyPr>
           <a:lstStyle/>
           <a:p>
             <a:pPr algn="ctr">
               <a:lnSpc>
-                <a:spcPts val="1130"/>
+                <a:spcPts val="1158"/>
               </a:lnSpc>
               <a:spcBef>
                 <a:spcPts val="0"/>
@@ -8330,8 +8348,8 @@
         </p:nvSpPr>
         <p:spPr>
           <a:xfrm>
-            <a:off x="5188712" y="4169469"/>
-            <a:ext cx="819404" cy="171014"/>
+            <a:off x="5188712" y="4176504"/>
+            <a:ext cx="819404" cy="174603"/>
           </a:xfrm>
           <a:prstGeom prst="rect">
             <a:avLst/>
@@ -8361,14 +8379,14 @@
           </a:fontRef>
         </p:style>
         <p:txBody>
-          <a:bodyPr rtlCol="0" anchor="ctr" wrap="none" lIns="0" rIns="0" tIns="0" bIns="0">
+          <a:bodyPr rtlCol="0" anchor="ctr" wrap="none" lIns="22860" rIns="22860" tIns="0" bIns="0">
             <a:noAutofit/>
           </a:bodyPr>
           <a:lstStyle/>
           <a:p>
             <a:pPr algn="ctr">
               <a:lnSpc>
-                <a:spcPts val="1130"/>
+                <a:spcPts val="1158"/>
               </a:lnSpc>
               <a:spcBef>
                 <a:spcPts val="0"/>
@@ -8397,8 +8415,8 @@
         </p:nvSpPr>
         <p:spPr>
           <a:xfrm>
-            <a:off x="6008116" y="4169469"/>
-            <a:ext cx="819404" cy="171014"/>
+            <a:off x="6008116" y="4176504"/>
+            <a:ext cx="819404" cy="174603"/>
           </a:xfrm>
           <a:prstGeom prst="rect">
             <a:avLst/>
@@ -8428,14 +8446,14 @@
           </a:fontRef>
         </p:style>
         <p:txBody>
-          <a:bodyPr rtlCol="0" anchor="ctr" wrap="none" lIns="0" rIns="0" tIns="0" bIns="0">
+          <a:bodyPr rtlCol="0" anchor="ctr" wrap="none" lIns="22860" rIns="22860" tIns="0" bIns="0">
             <a:noAutofit/>
           </a:bodyPr>
           <a:lstStyle/>
           <a:p>
             <a:pPr algn="ctr">
               <a:lnSpc>
-                <a:spcPts val="1130"/>
+                <a:spcPts val="1158"/>
               </a:lnSpc>
               <a:spcBef>
                 <a:spcPts val="0"/>
@@ -8464,8 +8482,8 @@
         </p:nvSpPr>
         <p:spPr>
           <a:xfrm>
-            <a:off x="6827520" y="4169469"/>
-            <a:ext cx="819404" cy="171014"/>
+            <a:off x="6827520" y="4176504"/>
+            <a:ext cx="819404" cy="174603"/>
           </a:xfrm>
           <a:prstGeom prst="rect">
             <a:avLst/>
@@ -8495,14 +8513,14 @@
           </a:fontRef>
         </p:style>
         <p:txBody>
-          <a:bodyPr rtlCol="0" anchor="ctr" wrap="none" lIns="0" rIns="0" tIns="0" bIns="0">
+          <a:bodyPr rtlCol="0" anchor="ctr" wrap="none" lIns="22860" rIns="22860" tIns="0" bIns="0">
             <a:noAutofit/>
           </a:bodyPr>
           <a:lstStyle/>
           <a:p>
             <a:pPr algn="ctr">
               <a:lnSpc>
-                <a:spcPts val="1130"/>
+                <a:spcPts val="1158"/>
               </a:lnSpc>
               <a:spcBef>
                 <a:spcPts val="0"/>
@@ -8531,8 +8549,8 @@
         </p:nvSpPr>
         <p:spPr>
           <a:xfrm>
-            <a:off x="7646924" y="4169469"/>
-            <a:ext cx="819404" cy="171014"/>
+            <a:off x="7646924" y="4176504"/>
+            <a:ext cx="819404" cy="174603"/>
           </a:xfrm>
           <a:prstGeom prst="rect">
             <a:avLst/>
@@ -8562,14 +8580,14 @@
           </a:fontRef>
         </p:style>
         <p:txBody>
-          <a:bodyPr rtlCol="0" anchor="ctr" wrap="none" lIns="0" rIns="0" tIns="0" bIns="0">
+          <a:bodyPr rtlCol="0" anchor="ctr" wrap="none" lIns="22860" rIns="22860" tIns="0" bIns="0">
             <a:noAutofit/>
           </a:bodyPr>
           <a:lstStyle/>
           <a:p>
             <a:pPr algn="ctr">
               <a:lnSpc>
-                <a:spcPts val="1130"/>
+                <a:spcPts val="1158"/>
               </a:lnSpc>
               <a:spcBef>
                 <a:spcPts val="0"/>
@@ -8598,8 +8616,8 @@
         </p:nvSpPr>
         <p:spPr>
           <a:xfrm>
-            <a:off x="8502904" y="3656427"/>
-            <a:ext cx="819404" cy="171014"/>
+            <a:off x="8502904" y="3652695"/>
+            <a:ext cx="819404" cy="174603"/>
           </a:xfrm>
           <a:prstGeom prst="rect">
             <a:avLst/>
@@ -8629,14 +8647,14 @@
           </a:fontRef>
         </p:style>
         <p:txBody>
-          <a:bodyPr rtlCol="0" anchor="ctr" wrap="none" lIns="0" rIns="0" tIns="0" bIns="0">
+          <a:bodyPr rtlCol="0" anchor="ctr" wrap="none" lIns="22860" rIns="22860" tIns="0" bIns="0">
             <a:noAutofit/>
           </a:bodyPr>
           <a:lstStyle/>
           <a:p>
             <a:pPr algn="ctr">
               <a:lnSpc>
-                <a:spcPts val="1130"/>
+                <a:spcPts val="1158"/>
               </a:lnSpc>
               <a:spcBef>
                 <a:spcPts val="0"/>
@@ -8665,8 +8683,8 @@
         </p:nvSpPr>
         <p:spPr>
           <a:xfrm>
-            <a:off x="9322308" y="3656427"/>
-            <a:ext cx="819404" cy="171014"/>
+            <a:off x="9322308" y="3652695"/>
+            <a:ext cx="819404" cy="174603"/>
           </a:xfrm>
           <a:prstGeom prst="rect">
             <a:avLst/>
@@ -8696,14 +8714,14 @@
           </a:fontRef>
         </p:style>
         <p:txBody>
-          <a:bodyPr rtlCol="0" anchor="ctr" wrap="none" lIns="0" rIns="0" tIns="0" bIns="0">
+          <a:bodyPr rtlCol="0" anchor="ctr" wrap="none" lIns="22860" rIns="22860" tIns="0" bIns="0">
             <a:noAutofit/>
           </a:bodyPr>
           <a:lstStyle/>
           <a:p>
             <a:pPr algn="ctr">
               <a:lnSpc>
-                <a:spcPts val="1130"/>
+                <a:spcPts val="1158"/>
               </a:lnSpc>
               <a:spcBef>
                 <a:spcPts val="0"/>
@@ -8732,8 +8750,8 @@
         </p:nvSpPr>
         <p:spPr>
           <a:xfrm>
-            <a:off x="10141712" y="3656427"/>
-            <a:ext cx="819404" cy="171014"/>
+            <a:off x="10141712" y="3652695"/>
+            <a:ext cx="819404" cy="174603"/>
           </a:xfrm>
           <a:prstGeom prst="rect">
             <a:avLst/>
@@ -8763,14 +8781,14 @@
           </a:fontRef>
         </p:style>
         <p:txBody>
-          <a:bodyPr rtlCol="0" anchor="ctr" wrap="none" lIns="0" rIns="0" tIns="0" bIns="0">
+          <a:bodyPr rtlCol="0" anchor="ctr" wrap="none" lIns="22860" rIns="22860" tIns="0" bIns="0">
             <a:noAutofit/>
           </a:bodyPr>
           <a:lstStyle/>
           <a:p>
             <a:pPr algn="ctr">
               <a:lnSpc>
-                <a:spcPts val="1130"/>
+                <a:spcPts val="1158"/>
               </a:lnSpc>
               <a:spcBef>
                 <a:spcPts val="0"/>
@@ -8786,7 +8804,16 @@
                 </a:solidFill>
                 <a:latin typeface="Segoe UI"/>
               </a:rPr>
-              <a:t>State Avg.</a:t>
+              <a:t>State </a:t>
+            </a:r>
+            <a:r>
+              <a:rPr sz="850" b="1" i="0">
+                <a:solidFill>
+                  <a:srgbClr val="2B2B2B"/>
+                </a:solidFill>
+                <a:latin typeface="Segoe UI"/>
+              </a:rPr>
+              <a:t>Avg.</a:t>
             </a:r>
           </a:p>
         </p:txBody>
@@ -8799,8 +8826,8 @@
         </p:nvSpPr>
         <p:spPr>
           <a:xfrm>
-            <a:off x="10961116" y="3656427"/>
-            <a:ext cx="819404" cy="171014"/>
+            <a:off x="10961116" y="3652695"/>
+            <a:ext cx="819404" cy="174603"/>
           </a:xfrm>
           <a:prstGeom prst="rect">
             <a:avLst/>
@@ -8830,14 +8857,14 @@
           </a:fontRef>
         </p:style>
         <p:txBody>
-          <a:bodyPr rtlCol="0" anchor="ctr" wrap="none" lIns="0" rIns="0" tIns="0" bIns="0">
+          <a:bodyPr rtlCol="0" anchor="ctr" wrap="none" lIns="22860" rIns="22860" tIns="0" bIns="0">
             <a:noAutofit/>
           </a:bodyPr>
           <a:lstStyle/>
           <a:p>
             <a:pPr algn="ctr">
               <a:lnSpc>
-                <a:spcPts val="1130"/>
+                <a:spcPts val="1158"/>
               </a:lnSpc>
               <a:spcBef>
                 <a:spcPts val="0"/>
@@ -8866,8 +8893,8 @@
         </p:nvSpPr>
         <p:spPr>
           <a:xfrm>
-            <a:off x="8502904" y="3827441"/>
-            <a:ext cx="819404" cy="171014"/>
+            <a:off x="8502904" y="3827298"/>
+            <a:ext cx="819404" cy="174603"/>
           </a:xfrm>
           <a:prstGeom prst="rect">
             <a:avLst/>
@@ -8897,14 +8924,14 @@
           </a:fontRef>
         </p:style>
         <p:txBody>
-          <a:bodyPr rtlCol="0" anchor="ctr" wrap="none" lIns="0" rIns="0" tIns="0" bIns="0">
+          <a:bodyPr rtlCol="0" anchor="ctr" wrap="none" lIns="22860" rIns="22860" tIns="0" bIns="0">
             <a:noAutofit/>
           </a:bodyPr>
           <a:lstStyle/>
           <a:p>
             <a:pPr algn="ctr">
               <a:lnSpc>
-                <a:spcPts val="1130"/>
+                <a:spcPts val="1158"/>
               </a:lnSpc>
               <a:spcBef>
                 <a:spcPts val="0"/>
@@ -8933,8 +8960,8 @@
         </p:nvSpPr>
         <p:spPr>
           <a:xfrm>
-            <a:off x="9322308" y="3827441"/>
-            <a:ext cx="819404" cy="171014"/>
+            <a:off x="9322308" y="3827298"/>
+            <a:ext cx="819404" cy="174603"/>
           </a:xfrm>
           <a:prstGeom prst="rect">
             <a:avLst/>
@@ -8964,14 +8991,14 @@
           </a:fontRef>
         </p:style>
         <p:txBody>
-          <a:bodyPr rtlCol="0" anchor="ctr" wrap="none" lIns="0" rIns="0" tIns="0" bIns="0">
+          <a:bodyPr rtlCol="0" anchor="ctr" wrap="none" lIns="22860" rIns="22860" tIns="0" bIns="0">
             <a:noAutofit/>
           </a:bodyPr>
           <a:lstStyle/>
           <a:p>
             <a:pPr algn="ctr">
               <a:lnSpc>
-                <a:spcPts val="1130"/>
+                <a:spcPts val="1158"/>
               </a:lnSpc>
               <a:spcBef>
                 <a:spcPts val="0"/>
@@ -9000,8 +9027,8 @@
         </p:nvSpPr>
         <p:spPr>
           <a:xfrm>
-            <a:off x="10141712" y="3827441"/>
-            <a:ext cx="819404" cy="171014"/>
+            <a:off x="10141712" y="3827298"/>
+            <a:ext cx="819404" cy="174603"/>
           </a:xfrm>
           <a:prstGeom prst="rect">
             <a:avLst/>
@@ -9031,14 +9058,14 @@
           </a:fontRef>
         </p:style>
         <p:txBody>
-          <a:bodyPr rtlCol="0" anchor="ctr" wrap="none" lIns="0" rIns="0" tIns="0" bIns="0">
+          <a:bodyPr rtlCol="0" anchor="ctr" wrap="none" lIns="22860" rIns="22860" tIns="0" bIns="0">
             <a:noAutofit/>
           </a:bodyPr>
           <a:lstStyle/>
           <a:p>
             <a:pPr algn="ctr">
               <a:lnSpc>
-                <a:spcPts val="1130"/>
+                <a:spcPts val="1158"/>
               </a:lnSpc>
               <a:spcBef>
                 <a:spcPts val="0"/>
@@ -9067,8 +9094,8 @@
         </p:nvSpPr>
         <p:spPr>
           <a:xfrm>
-            <a:off x="10961116" y="3827441"/>
-            <a:ext cx="819404" cy="171014"/>
+            <a:off x="10961116" y="3827298"/>
+            <a:ext cx="819404" cy="174603"/>
           </a:xfrm>
           <a:prstGeom prst="rect">
             <a:avLst/>
@@ -9098,14 +9125,14 @@
           </a:fontRef>
         </p:style>
         <p:txBody>
-          <a:bodyPr rtlCol="0" anchor="ctr" wrap="none" lIns="0" rIns="0" tIns="0" bIns="0">
+          <a:bodyPr rtlCol="0" anchor="ctr" wrap="none" lIns="22860" rIns="22860" tIns="0" bIns="0">
             <a:noAutofit/>
           </a:bodyPr>
           <a:lstStyle/>
           <a:p>
             <a:pPr algn="ctr">
               <a:lnSpc>
-                <a:spcPts val="1130"/>
+                <a:spcPts val="1158"/>
               </a:lnSpc>
               <a:spcBef>
                 <a:spcPts val="0"/>
@@ -9134,8 +9161,8 @@
         </p:nvSpPr>
         <p:spPr>
           <a:xfrm>
-            <a:off x="8502904" y="3998455"/>
-            <a:ext cx="819404" cy="171014"/>
+            <a:off x="8502904" y="4001901"/>
+            <a:ext cx="819404" cy="174603"/>
           </a:xfrm>
           <a:prstGeom prst="rect">
             <a:avLst/>
@@ -9165,14 +9192,14 @@
           </a:fontRef>
         </p:style>
         <p:txBody>
-          <a:bodyPr rtlCol="0" anchor="ctr" wrap="none" lIns="0" rIns="0" tIns="0" bIns="0">
+          <a:bodyPr rtlCol="0" anchor="ctr" wrap="none" lIns="22860" rIns="22860" tIns="0" bIns="0">
             <a:noAutofit/>
           </a:bodyPr>
           <a:lstStyle/>
           <a:p>
             <a:pPr algn="ctr">
               <a:lnSpc>
-                <a:spcPts val="1130"/>
+                <a:spcPts val="1158"/>
               </a:lnSpc>
               <a:spcBef>
                 <a:spcPts val="0"/>
@@ -9201,8 +9228,8 @@
         </p:nvSpPr>
         <p:spPr>
           <a:xfrm>
-            <a:off x="9322308" y="3998455"/>
-            <a:ext cx="819404" cy="171014"/>
+            <a:off x="9322308" y="4001901"/>
+            <a:ext cx="819404" cy="174603"/>
           </a:xfrm>
           <a:prstGeom prst="rect">
             <a:avLst/>
@@ -9232,14 +9259,14 @@
           </a:fontRef>
         </p:style>
         <p:txBody>
-          <a:bodyPr rtlCol="0" anchor="ctr" wrap="none" lIns="0" rIns="0" tIns="0" bIns="0">
+          <a:bodyPr rtlCol="0" anchor="ctr" wrap="none" lIns="22860" rIns="22860" tIns="0" bIns="0">
             <a:noAutofit/>
           </a:bodyPr>
           <a:lstStyle/>
           <a:p>
             <a:pPr algn="ctr">
               <a:lnSpc>
-                <a:spcPts val="1130"/>
+                <a:spcPts val="1158"/>
               </a:lnSpc>
               <a:spcBef>
                 <a:spcPts val="0"/>
@@ -9268,8 +9295,8 @@
         </p:nvSpPr>
         <p:spPr>
           <a:xfrm>
-            <a:off x="10141712" y="3998455"/>
-            <a:ext cx="819404" cy="171014"/>
+            <a:off x="10141712" y="4001901"/>
+            <a:ext cx="819404" cy="174603"/>
           </a:xfrm>
           <a:prstGeom prst="rect">
             <a:avLst/>
@@ -9299,14 +9326,14 @@
           </a:fontRef>
         </p:style>
         <p:txBody>
-          <a:bodyPr rtlCol="0" anchor="ctr" wrap="none" lIns="0" rIns="0" tIns="0" bIns="0">
+          <a:bodyPr rtlCol="0" anchor="ctr" wrap="none" lIns="22860" rIns="22860" tIns="0" bIns="0">
             <a:noAutofit/>
           </a:bodyPr>
           <a:lstStyle/>
           <a:p>
             <a:pPr algn="ctr">
               <a:lnSpc>
-                <a:spcPts val="1130"/>
+                <a:spcPts val="1158"/>
               </a:lnSpc>
               <a:spcBef>
                 <a:spcPts val="0"/>
@@ -9335,8 +9362,8 @@
         </p:nvSpPr>
         <p:spPr>
           <a:xfrm>
-            <a:off x="10961116" y="3998455"/>
-            <a:ext cx="819404" cy="171014"/>
+            <a:off x="10961116" y="4001901"/>
+            <a:ext cx="819404" cy="174603"/>
           </a:xfrm>
           <a:prstGeom prst="rect">
             <a:avLst/>
@@ -9366,14 +9393,14 @@
           </a:fontRef>
         </p:style>
         <p:txBody>
-          <a:bodyPr rtlCol="0" anchor="ctr" wrap="none" lIns="0" rIns="0" tIns="0" bIns="0">
+          <a:bodyPr rtlCol="0" anchor="ctr" wrap="none" lIns="22860" rIns="22860" tIns="0" bIns="0">
             <a:noAutofit/>
           </a:bodyPr>
           <a:lstStyle/>
           <a:p>
             <a:pPr algn="ctr">
               <a:lnSpc>
-                <a:spcPts val="1130"/>
+                <a:spcPts val="1158"/>
               </a:lnSpc>
               <a:spcBef>
                 <a:spcPts val="0"/>
@@ -9402,8 +9429,8 @@
         </p:nvSpPr>
         <p:spPr>
           <a:xfrm>
-            <a:off x="8502904" y="4169469"/>
-            <a:ext cx="819404" cy="171014"/>
+            <a:off x="8502904" y="4176504"/>
+            <a:ext cx="819404" cy="174603"/>
           </a:xfrm>
           <a:prstGeom prst="rect">
             <a:avLst/>
@@ -9433,14 +9460,14 @@
           </a:fontRef>
         </p:style>
         <p:txBody>
-          <a:bodyPr rtlCol="0" anchor="ctr" wrap="none" lIns="0" rIns="0" tIns="0" bIns="0">
+          <a:bodyPr rtlCol="0" anchor="ctr" wrap="none" lIns="22860" rIns="22860" tIns="0" bIns="0">
             <a:noAutofit/>
           </a:bodyPr>
           <a:lstStyle/>
           <a:p>
             <a:pPr algn="ctr">
               <a:lnSpc>
-                <a:spcPts val="1130"/>
+                <a:spcPts val="1158"/>
               </a:lnSpc>
               <a:spcBef>
                 <a:spcPts val="0"/>
@@ -9469,8 +9496,8 @@
         </p:nvSpPr>
         <p:spPr>
           <a:xfrm>
-            <a:off x="9322308" y="4169469"/>
-            <a:ext cx="819404" cy="171014"/>
+            <a:off x="9322308" y="4176504"/>
+            <a:ext cx="819404" cy="174603"/>
           </a:xfrm>
           <a:prstGeom prst="rect">
             <a:avLst/>
@@ -9500,14 +9527,14 @@
           </a:fontRef>
         </p:style>
         <p:txBody>
-          <a:bodyPr rtlCol="0" anchor="ctr" wrap="none" lIns="0" rIns="0" tIns="0" bIns="0">
+          <a:bodyPr rtlCol="0" anchor="ctr" wrap="none" lIns="22860" rIns="22860" tIns="0" bIns="0">
             <a:noAutofit/>
           </a:bodyPr>
           <a:lstStyle/>
           <a:p>
             <a:pPr algn="ctr">
               <a:lnSpc>
-                <a:spcPts val="1130"/>
+                <a:spcPts val="1158"/>
               </a:lnSpc>
               <a:spcBef>
                 <a:spcPts val="0"/>
@@ -9536,8 +9563,8 @@
         </p:nvSpPr>
         <p:spPr>
           <a:xfrm>
-            <a:off x="10141712" y="4169469"/>
-            <a:ext cx="819404" cy="171014"/>
+            <a:off x="10141712" y="4176504"/>
+            <a:ext cx="819404" cy="174603"/>
           </a:xfrm>
           <a:prstGeom prst="rect">
             <a:avLst/>
@@ -9567,14 +9594,14 @@
           </a:fontRef>
         </p:style>
         <p:txBody>
-          <a:bodyPr rtlCol="0" anchor="ctr" wrap="none" lIns="0" rIns="0" tIns="0" bIns="0">
+          <a:bodyPr rtlCol="0" anchor="ctr" wrap="none" lIns="22860" rIns="22860" tIns="0" bIns="0">
             <a:noAutofit/>
           </a:bodyPr>
           <a:lstStyle/>
           <a:p>
             <a:pPr algn="ctr">
               <a:lnSpc>
-                <a:spcPts val="1130"/>
+                <a:spcPts val="1158"/>
               </a:lnSpc>
               <a:spcBef>
                 <a:spcPts val="0"/>
@@ -9603,8 +9630,8 @@
         </p:nvSpPr>
         <p:spPr>
           <a:xfrm>
-            <a:off x="10961116" y="4169469"/>
-            <a:ext cx="819404" cy="171014"/>
+            <a:off x="10961116" y="4176504"/>
+            <a:ext cx="819404" cy="174603"/>
           </a:xfrm>
           <a:prstGeom prst="rect">
             <a:avLst/>
@@ -9634,14 +9661,14 @@
           </a:fontRef>
         </p:style>
         <p:txBody>
-          <a:bodyPr rtlCol="0" anchor="ctr" wrap="none" lIns="0" rIns="0" tIns="0" bIns="0">
+          <a:bodyPr rtlCol="0" anchor="ctr" wrap="none" lIns="22860" rIns="22860" tIns="0" bIns="0">
             <a:noAutofit/>
           </a:bodyPr>
           <a:lstStyle/>
           <a:p>
             <a:pPr algn="ctr">
               <a:lnSpc>
-                <a:spcPts val="1130"/>
+                <a:spcPts val="1158"/>
               </a:lnSpc>
               <a:spcBef>
                 <a:spcPts val="0"/>
@@ -9671,7 +9698,7 @@
         <p:spPr>
           <a:xfrm>
             <a:off x="5170424" y="1051560"/>
-            <a:ext cx="0" cy="3596648"/>
+            <a:ext cx="0" cy="3594063"/>
           </a:xfrm>
           <a:prstGeom prst="line">
             <a:avLst/>
@@ -9707,7 +9734,7 @@
         <p:spPr>
           <a:xfrm>
             <a:off x="8484616" y="1051560"/>
-            <a:ext cx="0" cy="3596648"/>
+            <a:ext cx="0" cy="3594063"/>
           </a:xfrm>
           <a:prstGeom prst="line">
             <a:avLst/>
@@ -9742,8 +9769,8 @@
         </p:nvSpPr>
         <p:spPr>
           <a:xfrm>
-            <a:off x="411480" y="4739649"/>
-            <a:ext cx="11369040" cy="1398697"/>
+            <a:off x="411480" y="4737065"/>
+            <a:ext cx="11369040" cy="1397692"/>
           </a:xfrm>
           <a:prstGeom prst="rect">
             <a:avLst/>
@@ -9788,8 +9815,8 @@
         </p:nvSpPr>
         <p:spPr>
           <a:xfrm>
-            <a:off x="484632" y="5203209"/>
-            <a:ext cx="1253256" cy="168920"/>
+            <a:off x="484632" y="5194844"/>
+            <a:ext cx="1253256" cy="173143"/>
           </a:xfrm>
           <a:prstGeom prst="rect">
             <a:avLst/>
@@ -9804,7 +9831,7 @@
           <a:p>
             <a:pPr algn="ctr">
               <a:lnSpc>
-                <a:spcPts val="1330"/>
+                <a:spcPts val="1363"/>
               </a:lnSpc>
               <a:spcBef>
                 <a:spcPts val="0"/>
@@ -9833,8 +9860,8 @@
         </p:nvSpPr>
         <p:spPr>
           <a:xfrm>
-            <a:off x="484632" y="5394989"/>
-            <a:ext cx="1253256" cy="253380"/>
+            <a:off x="484632" y="5390847"/>
+            <a:ext cx="1253256" cy="259714"/>
           </a:xfrm>
           <a:prstGeom prst="rect">
             <a:avLst/>
@@ -9849,7 +9876,7 @@
           <a:p>
             <a:pPr algn="ctr">
               <a:lnSpc>
-                <a:spcPts val="1995"/>
+                <a:spcPts val="2044"/>
               </a:lnSpc>
               <a:spcBef>
                 <a:spcPts val="0"/>
@@ -9878,7 +9905,7 @@
         </p:nvCxnSpPr>
         <p:spPr>
           <a:xfrm>
-            <a:off x="735283" y="5668435"/>
+            <a:off x="735283" y="5670627"/>
             <a:ext cx="751954" cy="0"/>
           </a:xfrm>
           <a:prstGeom prst="line">
@@ -9913,8 +9940,8 @@
         </p:nvSpPr>
         <p:spPr>
           <a:xfrm>
-            <a:off x="1737888" y="5203209"/>
-            <a:ext cx="1253256" cy="168920"/>
+            <a:off x="1737888" y="5194844"/>
+            <a:ext cx="1253256" cy="173143"/>
           </a:xfrm>
           <a:prstGeom prst="rect">
             <a:avLst/>
@@ -9929,7 +9956,7 @@
           <a:p>
             <a:pPr algn="ctr">
               <a:lnSpc>
-                <a:spcPts val="1330"/>
+                <a:spcPts val="1363"/>
               </a:lnSpc>
               <a:spcBef>
                 <a:spcPts val="0"/>
@@ -9958,8 +9985,8 @@
         </p:nvSpPr>
         <p:spPr>
           <a:xfrm>
-            <a:off x="1737888" y="5394989"/>
-            <a:ext cx="1253256" cy="253380"/>
+            <a:off x="1737888" y="5390847"/>
+            <a:ext cx="1253256" cy="259714"/>
           </a:xfrm>
           <a:prstGeom prst="rect">
             <a:avLst/>
@@ -9974,7 +10001,7 @@
           <a:p>
             <a:pPr algn="ctr">
               <a:lnSpc>
-                <a:spcPts val="1995"/>
+                <a:spcPts val="2044"/>
               </a:lnSpc>
               <a:spcBef>
                 <a:spcPts val="0"/>
@@ -10003,7 +10030,7 @@
         </p:nvCxnSpPr>
         <p:spPr>
           <a:xfrm>
-            <a:off x="1988539" y="5668435"/>
+            <a:off x="1988539" y="5670627"/>
             <a:ext cx="751954" cy="0"/>
           </a:xfrm>
           <a:prstGeom prst="line">
@@ -10038,8 +10065,8 @@
         </p:nvSpPr>
         <p:spPr>
           <a:xfrm>
-            <a:off x="2991144" y="5203209"/>
-            <a:ext cx="1253257" cy="168920"/>
+            <a:off x="2991144" y="5194844"/>
+            <a:ext cx="1253257" cy="173143"/>
           </a:xfrm>
           <a:prstGeom prst="rect">
             <a:avLst/>
@@ -10054,7 +10081,7 @@
           <a:p>
             <a:pPr algn="ctr">
               <a:lnSpc>
-                <a:spcPts val="1330"/>
+                <a:spcPts val="1363"/>
               </a:lnSpc>
               <a:spcBef>
                 <a:spcPts val="0"/>
@@ -10083,8 +10110,8 @@
         </p:nvSpPr>
         <p:spPr>
           <a:xfrm>
-            <a:off x="2991144" y="5394989"/>
-            <a:ext cx="1253257" cy="253380"/>
+            <a:off x="2991144" y="5390847"/>
+            <a:ext cx="1253257" cy="259714"/>
           </a:xfrm>
           <a:prstGeom prst="rect">
             <a:avLst/>
@@ -10099,7 +10126,7 @@
           <a:p>
             <a:pPr algn="ctr">
               <a:lnSpc>
-                <a:spcPts val="1995"/>
+                <a:spcPts val="2044"/>
               </a:lnSpc>
               <a:spcBef>
                 <a:spcPts val="0"/>
@@ -10128,7 +10155,7 @@
         </p:nvCxnSpPr>
         <p:spPr>
           <a:xfrm>
-            <a:off x="3241795" y="5668435"/>
+            <a:off x="3241795" y="5670627"/>
             <a:ext cx="751954" cy="0"/>
           </a:xfrm>
           <a:prstGeom prst="line">
@@ -10163,8 +10190,8 @@
         </p:nvSpPr>
         <p:spPr>
           <a:xfrm>
-            <a:off x="4299265" y="5270077"/>
-            <a:ext cx="2653955" cy="337840"/>
+            <a:off x="4299265" y="5262768"/>
+            <a:ext cx="2653955" cy="346286"/>
           </a:xfrm>
           <a:prstGeom prst="rect">
             <a:avLst/>
@@ -10179,7 +10206,7 @@
           <a:p>
             <a:pPr algn="ctr">
               <a:lnSpc>
-                <a:spcPts val="1330"/>
+                <a:spcPts val="1363"/>
               </a:lnSpc>
               <a:spcBef>
                 <a:spcPts val="0"/>
@@ -10255,7 +10282,7 @@
           <a:p>
             <a:pPr algn="ctr">
               <a:lnSpc>
-                <a:spcPts val="1330"/>
+                <a:spcPts val="1363"/>
               </a:lnSpc>
               <a:spcBef>
                 <a:spcPts val="0"/>
@@ -10302,8 +10329,8 @@
         </p:nvSpPr>
         <p:spPr>
           <a:xfrm>
-            <a:off x="7008084" y="5270077"/>
-            <a:ext cx="2322210" cy="337840"/>
+            <a:off x="7008084" y="5262768"/>
+            <a:ext cx="2322210" cy="346286"/>
           </a:xfrm>
           <a:prstGeom prst="rect">
             <a:avLst/>
@@ -10318,7 +10345,7 @@
           <a:p>
             <a:pPr algn="ctr">
               <a:lnSpc>
-                <a:spcPts val="1330"/>
+                <a:spcPts val="1363"/>
               </a:lnSpc>
               <a:spcBef>
                 <a:spcPts val="0"/>
@@ -10376,7 +10403,7 @@
           <a:p>
             <a:pPr algn="ctr">
               <a:lnSpc>
-                <a:spcPts val="1330"/>
+                <a:spcPts val="1363"/>
               </a:lnSpc>
               <a:spcBef>
                 <a:spcPts val="0"/>
@@ -10423,8 +10450,8 @@
         </p:nvSpPr>
         <p:spPr>
           <a:xfrm>
-            <a:off x="9385158" y="5270077"/>
-            <a:ext cx="2322210" cy="337840"/>
+            <a:off x="9385158" y="5262768"/>
+            <a:ext cx="2322210" cy="346286"/>
           </a:xfrm>
           <a:prstGeom prst="rect">
             <a:avLst/>
@@ -10439,7 +10466,7 @@
           <a:p>
             <a:pPr algn="ctr">
               <a:lnSpc>
-                <a:spcPts val="1330"/>
+                <a:spcPts val="1363"/>
               </a:lnSpc>
               <a:spcBef>
                 <a:spcPts val="0"/>
@@ -10488,7 +10515,7 @@
           <a:p>
             <a:pPr algn="ctr">
               <a:lnSpc>
-                <a:spcPts val="1330"/>
+                <a:spcPts val="1363"/>
               </a:lnSpc>
               <a:spcBef>
                 <a:spcPts val="0"/>
